--- a/docs/pptx/entire/ritu-entire-linsubhr-disc-anemia3.pptx
+++ b/docs/pptx/entire/ritu-entire-linsubhr-disc-anemia3.pptx
@@ -3045,612 +3045,612 @@
           </p:nvSpPr>
           <p:spPr>
             <a:xfrm>
-              <a:off x="1172049" y="2758862"/>
-              <a:ext cx="7090630" cy="2340077"/>
+              <a:off x="1172049" y="2750903"/>
+              <a:ext cx="7090630" cy="2348670"/>
             </a:xfrm>
             <a:custGeom>
               <a:avLst/>
               <a:pathLst>
-                <a:path w="7090630" h="2340077">
+                <a:path w="7090630" h="2348670">
                   <a:moveTo>
                     <a:pt x="0" y="0"/>
                   </a:moveTo>
                   <a:lnTo>
-                    <a:pt x="71622" y="50676"/>
-                  </a:lnTo>
-                  <a:lnTo>
-                    <a:pt x="143245" y="100435"/>
-                  </a:lnTo>
-                  <a:lnTo>
-                    <a:pt x="214867" y="149293"/>
-                  </a:lnTo>
-                  <a:lnTo>
-                    <a:pt x="286490" y="197267"/>
-                  </a:lnTo>
-                  <a:lnTo>
-                    <a:pt x="358112" y="244371"/>
-                  </a:lnTo>
-                  <a:lnTo>
-                    <a:pt x="429735" y="290623"/>
-                  </a:lnTo>
-                  <a:lnTo>
-                    <a:pt x="501357" y="336036"/>
-                  </a:lnTo>
-                  <a:lnTo>
-                    <a:pt x="572980" y="380628"/>
-                  </a:lnTo>
-                  <a:lnTo>
-                    <a:pt x="644602" y="424412"/>
-                  </a:lnTo>
-                  <a:lnTo>
-                    <a:pt x="716225" y="467403"/>
-                  </a:lnTo>
-                  <a:lnTo>
-                    <a:pt x="787847" y="509615"/>
-                  </a:lnTo>
-                  <a:lnTo>
-                    <a:pt x="859470" y="551063"/>
-                  </a:lnTo>
-                  <a:lnTo>
-                    <a:pt x="931092" y="591761"/>
-                  </a:lnTo>
-                  <a:lnTo>
-                    <a:pt x="1002715" y="631721"/>
-                  </a:lnTo>
-                  <a:lnTo>
-                    <a:pt x="1074337" y="670958"/>
-                  </a:lnTo>
-                  <a:lnTo>
-                    <a:pt x="1145960" y="709484"/>
-                  </a:lnTo>
-                  <a:lnTo>
-                    <a:pt x="1217582" y="747313"/>
-                  </a:lnTo>
-                  <a:lnTo>
-                    <a:pt x="1289205" y="784456"/>
-                  </a:lnTo>
-                  <a:lnTo>
-                    <a:pt x="1360827" y="820927"/>
-                  </a:lnTo>
-                  <a:lnTo>
-                    <a:pt x="1432450" y="856738"/>
-                  </a:lnTo>
-                  <a:lnTo>
-                    <a:pt x="1504073" y="891900"/>
-                  </a:lnTo>
-                  <a:lnTo>
-                    <a:pt x="1575695" y="926425"/>
-                  </a:lnTo>
-                  <a:lnTo>
-                    <a:pt x="1647318" y="960325"/>
-                  </a:lnTo>
-                  <a:lnTo>
-                    <a:pt x="1718940" y="993611"/>
-                  </a:lnTo>
-                  <a:lnTo>
-                    <a:pt x="1790563" y="1026294"/>
-                  </a:lnTo>
-                  <a:lnTo>
-                    <a:pt x="1862185" y="1058385"/>
-                  </a:lnTo>
-                  <a:lnTo>
-                    <a:pt x="1933808" y="1089896"/>
-                  </a:lnTo>
-                  <a:lnTo>
-                    <a:pt x="2005430" y="1120835"/>
-                  </a:lnTo>
-                  <a:lnTo>
-                    <a:pt x="2077053" y="1151214"/>
-                  </a:lnTo>
-                  <a:lnTo>
-                    <a:pt x="2148675" y="1181044"/>
-                  </a:lnTo>
-                  <a:lnTo>
-                    <a:pt x="2220298" y="1210332"/>
-                  </a:lnTo>
-                  <a:lnTo>
-                    <a:pt x="2291920" y="1239091"/>
-                  </a:lnTo>
-                  <a:lnTo>
-                    <a:pt x="2363543" y="1267329"/>
-                  </a:lnTo>
-                  <a:lnTo>
-                    <a:pt x="2435165" y="1295055"/>
-                  </a:lnTo>
-                  <a:lnTo>
-                    <a:pt x="2506788" y="1322279"/>
-                  </a:lnTo>
-                  <a:lnTo>
-                    <a:pt x="2578410" y="1349011"/>
-                  </a:lnTo>
-                  <a:lnTo>
-                    <a:pt x="2650033" y="1375258"/>
-                  </a:lnTo>
-                  <a:lnTo>
-                    <a:pt x="2721655" y="1401030"/>
-                  </a:lnTo>
-                  <a:lnTo>
-                    <a:pt x="2793278" y="1426335"/>
-                  </a:lnTo>
-                  <a:lnTo>
-                    <a:pt x="2864901" y="1451182"/>
-                  </a:lnTo>
-                  <a:lnTo>
-                    <a:pt x="2936523" y="1475579"/>
-                  </a:lnTo>
-                  <a:lnTo>
-                    <a:pt x="3008146" y="1499534"/>
-                  </a:lnTo>
-                  <a:lnTo>
-                    <a:pt x="3079768" y="1523055"/>
-                  </a:lnTo>
-                  <a:lnTo>
-                    <a:pt x="3151391" y="1546151"/>
-                  </a:lnTo>
-                  <a:lnTo>
-                    <a:pt x="3223013" y="1568828"/>
-                  </a:lnTo>
-                  <a:lnTo>
-                    <a:pt x="3294636" y="1591094"/>
-                  </a:lnTo>
-                  <a:lnTo>
-                    <a:pt x="3366258" y="1612957"/>
-                  </a:lnTo>
-                  <a:lnTo>
-                    <a:pt x="3437881" y="1634425"/>
-                  </a:lnTo>
-                  <a:lnTo>
-                    <a:pt x="3509503" y="1655503"/>
-                  </a:lnTo>
-                  <a:lnTo>
-                    <a:pt x="3581126" y="1676200"/>
-                  </a:lnTo>
-                  <a:lnTo>
-                    <a:pt x="3652748" y="1696522"/>
-                  </a:lnTo>
-                  <a:lnTo>
-                    <a:pt x="3724371" y="1716476"/>
-                  </a:lnTo>
-                  <a:lnTo>
-                    <a:pt x="3795993" y="1736069"/>
-                  </a:lnTo>
-                  <a:lnTo>
-                    <a:pt x="3867616" y="1755307"/>
-                  </a:lnTo>
-                  <a:lnTo>
-                    <a:pt x="3939238" y="1774196"/>
-                  </a:lnTo>
-                  <a:lnTo>
-                    <a:pt x="4010861" y="1792743"/>
-                  </a:lnTo>
-                  <a:lnTo>
-                    <a:pt x="4082483" y="1810955"/>
-                  </a:lnTo>
-                  <a:lnTo>
-                    <a:pt x="4154106" y="1828837"/>
-                  </a:lnTo>
-                  <a:lnTo>
-                    <a:pt x="4225729" y="1846394"/>
-                  </a:lnTo>
-                  <a:lnTo>
-                    <a:pt x="4297351" y="1863634"/>
-                  </a:lnTo>
-                  <a:lnTo>
-                    <a:pt x="4368974" y="1880562"/>
-                  </a:lnTo>
-                  <a:lnTo>
-                    <a:pt x="4440596" y="1897183"/>
-                  </a:lnTo>
-                  <a:lnTo>
-                    <a:pt x="4512219" y="1913503"/>
-                  </a:lnTo>
-                  <a:lnTo>
-                    <a:pt x="4583841" y="1929528"/>
-                  </a:lnTo>
-                  <a:lnTo>
-                    <a:pt x="4655464" y="1945262"/>
-                  </a:lnTo>
-                  <a:lnTo>
-                    <a:pt x="4727086" y="1960712"/>
-                  </a:lnTo>
-                  <a:lnTo>
-                    <a:pt x="4798709" y="1970006"/>
-                  </a:lnTo>
-                  <a:lnTo>
-                    <a:pt x="4870331" y="1972350"/>
-                  </a:lnTo>
-                  <a:lnTo>
-                    <a:pt x="4941954" y="1974687"/>
-                  </a:lnTo>
-                  <a:lnTo>
-                    <a:pt x="5013576" y="1977017"/>
-                  </a:lnTo>
-                  <a:lnTo>
-                    <a:pt x="5085199" y="1979341"/>
-                  </a:lnTo>
-                  <a:lnTo>
-                    <a:pt x="5156821" y="1981658"/>
-                  </a:lnTo>
-                  <a:lnTo>
-                    <a:pt x="5228444" y="1983969"/>
-                  </a:lnTo>
-                  <a:lnTo>
-                    <a:pt x="5300066" y="1986273"/>
-                  </a:lnTo>
-                  <a:lnTo>
-                    <a:pt x="5371689" y="1988571"/>
-                  </a:lnTo>
-                  <a:lnTo>
-                    <a:pt x="5443311" y="1990862"/>
-                  </a:lnTo>
-                  <a:lnTo>
-                    <a:pt x="5514934" y="1993147"/>
-                  </a:lnTo>
-                  <a:lnTo>
-                    <a:pt x="5586557" y="1995425"/>
-                  </a:lnTo>
-                  <a:lnTo>
-                    <a:pt x="5658179" y="1997697"/>
-                  </a:lnTo>
-                  <a:lnTo>
-                    <a:pt x="5729802" y="1999962"/>
-                  </a:lnTo>
-                  <a:lnTo>
-                    <a:pt x="5801424" y="2002221"/>
-                  </a:lnTo>
-                  <a:lnTo>
-                    <a:pt x="5873047" y="2004474"/>
-                  </a:lnTo>
-                  <a:lnTo>
-                    <a:pt x="5944669" y="2006720"/>
-                  </a:lnTo>
-                  <a:lnTo>
-                    <a:pt x="6016292" y="2008960"/>
-                  </a:lnTo>
-                  <a:lnTo>
-                    <a:pt x="6087914" y="2011193"/>
-                  </a:lnTo>
-                  <a:lnTo>
-                    <a:pt x="6159537" y="2013420"/>
-                  </a:lnTo>
-                  <a:lnTo>
-                    <a:pt x="6231159" y="2015641"/>
-                  </a:lnTo>
-                  <a:lnTo>
-                    <a:pt x="6302782" y="2017856"/>
-                  </a:lnTo>
-                  <a:lnTo>
-                    <a:pt x="6374404" y="2020064"/>
-                  </a:lnTo>
-                  <a:lnTo>
-                    <a:pt x="6446027" y="2022266"/>
-                  </a:lnTo>
-                  <a:lnTo>
-                    <a:pt x="6517649" y="2024462"/>
-                  </a:lnTo>
-                  <a:lnTo>
-                    <a:pt x="6589272" y="2026652"/>
-                  </a:lnTo>
-                  <a:lnTo>
-                    <a:pt x="6660894" y="2028835"/>
-                  </a:lnTo>
-                  <a:lnTo>
-                    <a:pt x="6732517" y="2031012"/>
-                  </a:lnTo>
-                  <a:lnTo>
-                    <a:pt x="6804139" y="2033184"/>
-                  </a:lnTo>
-                  <a:lnTo>
-                    <a:pt x="6875762" y="2035348"/>
-                  </a:lnTo>
-                  <a:lnTo>
-                    <a:pt x="6947385" y="2037507"/>
-                  </a:lnTo>
-                  <a:lnTo>
-                    <a:pt x="7019007" y="2039660"/>
-                  </a:lnTo>
-                  <a:lnTo>
-                    <a:pt x="7090630" y="2041807"/>
-                  </a:lnTo>
-                  <a:lnTo>
-                    <a:pt x="7090630" y="2340077"/>
-                  </a:lnTo>
-                  <a:lnTo>
-                    <a:pt x="7019007" y="2331624"/>
-                  </a:lnTo>
-                  <a:lnTo>
-                    <a:pt x="6947385" y="2323016"/>
-                  </a:lnTo>
-                  <a:lnTo>
-                    <a:pt x="6875762" y="2314248"/>
-                  </a:lnTo>
-                  <a:lnTo>
-                    <a:pt x="6804139" y="2305319"/>
-                  </a:lnTo>
-                  <a:lnTo>
-                    <a:pt x="6732517" y="2296225"/>
-                  </a:lnTo>
-                  <a:lnTo>
-                    <a:pt x="6660894" y="2286964"/>
-                  </a:lnTo>
-                  <a:lnTo>
-                    <a:pt x="6589272" y="2277531"/>
-                  </a:lnTo>
-                  <a:lnTo>
-                    <a:pt x="6517649" y="2267925"/>
-                  </a:lnTo>
-                  <a:lnTo>
-                    <a:pt x="6446027" y="2258142"/>
-                  </a:lnTo>
-                  <a:lnTo>
-                    <a:pt x="6374404" y="2248178"/>
-                  </a:lnTo>
-                  <a:lnTo>
-                    <a:pt x="6302782" y="2238030"/>
-                  </a:lnTo>
-                  <a:lnTo>
-                    <a:pt x="6231159" y="2227695"/>
-                  </a:lnTo>
-                  <a:lnTo>
-                    <a:pt x="6159537" y="2217170"/>
-                  </a:lnTo>
-                  <a:lnTo>
-                    <a:pt x="6087914" y="2206450"/>
-                  </a:lnTo>
-                  <a:lnTo>
-                    <a:pt x="6016292" y="2195533"/>
-                  </a:lnTo>
-                  <a:lnTo>
-                    <a:pt x="5944669" y="2184414"/>
-                  </a:lnTo>
-                  <a:lnTo>
-                    <a:pt x="5873047" y="2173091"/>
-                  </a:lnTo>
-                  <a:lnTo>
-                    <a:pt x="5801424" y="2161558"/>
-                  </a:lnTo>
-                  <a:lnTo>
-                    <a:pt x="5729802" y="2149813"/>
-                  </a:lnTo>
-                  <a:lnTo>
-                    <a:pt x="5658179" y="2137851"/>
-                  </a:lnTo>
-                  <a:lnTo>
-                    <a:pt x="5586557" y="2125669"/>
-                  </a:lnTo>
-                  <a:lnTo>
-                    <a:pt x="5514934" y="2113261"/>
-                  </a:lnTo>
-                  <a:lnTo>
-                    <a:pt x="5443311" y="2100625"/>
-                  </a:lnTo>
-                  <a:lnTo>
-                    <a:pt x="5371689" y="2087756"/>
-                  </a:lnTo>
-                  <a:lnTo>
-                    <a:pt x="5300066" y="2074650"/>
-                  </a:lnTo>
-                  <a:lnTo>
-                    <a:pt x="5228444" y="2061302"/>
-                  </a:lnTo>
-                  <a:lnTo>
-                    <a:pt x="5156821" y="2047708"/>
-                  </a:lnTo>
-                  <a:lnTo>
-                    <a:pt x="5085199" y="2033863"/>
-                  </a:lnTo>
-                  <a:lnTo>
-                    <a:pt x="5013576" y="2019762"/>
-                  </a:lnTo>
-                  <a:lnTo>
-                    <a:pt x="4941954" y="2005402"/>
-                  </a:lnTo>
-                  <a:lnTo>
-                    <a:pt x="4870331" y="1990777"/>
-                  </a:lnTo>
-                  <a:lnTo>
-                    <a:pt x="4798709" y="1975882"/>
-                  </a:lnTo>
-                  <a:lnTo>
-                    <a:pt x="4727086" y="1967656"/>
-                  </a:lnTo>
-                  <a:lnTo>
-                    <a:pt x="4655464" y="1965299"/>
-                  </a:lnTo>
-                  <a:lnTo>
-                    <a:pt x="4583841" y="1962935"/>
-                  </a:lnTo>
-                  <a:lnTo>
-                    <a:pt x="4512219" y="1960565"/>
-                  </a:lnTo>
-                  <a:lnTo>
-                    <a:pt x="4440596" y="1958187"/>
-                  </a:lnTo>
-                  <a:lnTo>
-                    <a:pt x="4368974" y="1955803"/>
-                  </a:lnTo>
-                  <a:lnTo>
-                    <a:pt x="4297351" y="1953413"/>
-                  </a:lnTo>
-                  <a:lnTo>
-                    <a:pt x="4225729" y="1951015"/>
-                  </a:lnTo>
-                  <a:lnTo>
-                    <a:pt x="4154106" y="1948611"/>
-                  </a:lnTo>
-                  <a:lnTo>
-                    <a:pt x="4082483" y="1946200"/>
-                  </a:lnTo>
-                  <a:lnTo>
-                    <a:pt x="4010861" y="1943782"/>
-                  </a:lnTo>
-                  <a:lnTo>
-                    <a:pt x="3939238" y="1941357"/>
-                  </a:lnTo>
-                  <a:lnTo>
-                    <a:pt x="3867616" y="1938926"/>
-                  </a:lnTo>
-                  <a:lnTo>
-                    <a:pt x="3795993" y="1936487"/>
-                  </a:lnTo>
-                  <a:lnTo>
-                    <a:pt x="3724371" y="1934042"/>
-                  </a:lnTo>
-                  <a:lnTo>
-                    <a:pt x="3652748" y="1931589"/>
-                  </a:lnTo>
-                  <a:lnTo>
-                    <a:pt x="3581126" y="1929130"/>
-                  </a:lnTo>
-                  <a:lnTo>
-                    <a:pt x="3509503" y="1926664"/>
-                  </a:lnTo>
-                  <a:lnTo>
-                    <a:pt x="3437881" y="1924190"/>
-                  </a:lnTo>
-                  <a:lnTo>
-                    <a:pt x="3366258" y="1921710"/>
-                  </a:lnTo>
-                  <a:lnTo>
-                    <a:pt x="3294636" y="1919223"/>
-                  </a:lnTo>
-                  <a:lnTo>
-                    <a:pt x="3223013" y="1916728"/>
-                  </a:lnTo>
-                  <a:lnTo>
-                    <a:pt x="3151391" y="1914227"/>
-                  </a:lnTo>
-                  <a:lnTo>
-                    <a:pt x="3079768" y="1911718"/>
-                  </a:lnTo>
-                  <a:lnTo>
-                    <a:pt x="3008146" y="1909202"/>
-                  </a:lnTo>
-                  <a:lnTo>
-                    <a:pt x="2936523" y="1906680"/>
-                  </a:lnTo>
-                  <a:lnTo>
-                    <a:pt x="2864901" y="1904150"/>
-                  </a:lnTo>
-                  <a:lnTo>
-                    <a:pt x="2793278" y="1901612"/>
-                  </a:lnTo>
-                  <a:lnTo>
-                    <a:pt x="2721655" y="1899068"/>
-                  </a:lnTo>
-                  <a:lnTo>
-                    <a:pt x="2650033" y="1896516"/>
-                  </a:lnTo>
-                  <a:lnTo>
-                    <a:pt x="2578410" y="1893957"/>
-                  </a:lnTo>
-                  <a:lnTo>
-                    <a:pt x="2506788" y="1891391"/>
-                  </a:lnTo>
-                  <a:lnTo>
-                    <a:pt x="2435165" y="1888818"/>
-                  </a:lnTo>
-                  <a:lnTo>
-                    <a:pt x="2363543" y="1886237"/>
-                  </a:lnTo>
-                  <a:lnTo>
-                    <a:pt x="2291920" y="1883649"/>
-                  </a:lnTo>
-                  <a:lnTo>
-                    <a:pt x="2220298" y="1881054"/>
-                  </a:lnTo>
-                  <a:lnTo>
-                    <a:pt x="2148675" y="1878451"/>
-                  </a:lnTo>
-                  <a:lnTo>
-                    <a:pt x="2077053" y="1875841"/>
-                  </a:lnTo>
-                  <a:lnTo>
-                    <a:pt x="2005430" y="1873223"/>
-                  </a:lnTo>
-                  <a:lnTo>
-                    <a:pt x="1933808" y="1870599"/>
-                  </a:lnTo>
-                  <a:lnTo>
-                    <a:pt x="1862185" y="1867966"/>
-                  </a:lnTo>
-                  <a:lnTo>
-                    <a:pt x="1790563" y="1865326"/>
-                  </a:lnTo>
-                  <a:lnTo>
-                    <a:pt x="1718940" y="1862679"/>
-                  </a:lnTo>
-                  <a:lnTo>
-                    <a:pt x="1647318" y="1860024"/>
-                  </a:lnTo>
-                  <a:lnTo>
-                    <a:pt x="1575695" y="1857362"/>
-                  </a:lnTo>
-                  <a:lnTo>
-                    <a:pt x="1504073" y="1854692"/>
-                  </a:lnTo>
-                  <a:lnTo>
-                    <a:pt x="1432450" y="1852014"/>
-                  </a:lnTo>
-                  <a:lnTo>
-                    <a:pt x="1360827" y="1849329"/>
-                  </a:lnTo>
-                  <a:lnTo>
-                    <a:pt x="1289205" y="1846636"/>
-                  </a:lnTo>
-                  <a:lnTo>
-                    <a:pt x="1217582" y="1843936"/>
-                  </a:lnTo>
-                  <a:lnTo>
-                    <a:pt x="1145960" y="1841228"/>
-                  </a:lnTo>
-                  <a:lnTo>
-                    <a:pt x="1074337" y="1838512"/>
-                  </a:lnTo>
-                  <a:lnTo>
-                    <a:pt x="1002715" y="1835789"/>
-                  </a:lnTo>
-                  <a:lnTo>
-                    <a:pt x="931092" y="1833058"/>
-                  </a:lnTo>
-                  <a:lnTo>
-                    <a:pt x="859470" y="1830319"/>
-                  </a:lnTo>
-                  <a:lnTo>
-                    <a:pt x="787847" y="1827572"/>
-                  </a:lnTo>
-                  <a:lnTo>
-                    <a:pt x="716225" y="1824817"/>
-                  </a:lnTo>
-                  <a:lnTo>
-                    <a:pt x="644602" y="1822055"/>
-                  </a:lnTo>
-                  <a:lnTo>
-                    <a:pt x="572980" y="1819285"/>
-                  </a:lnTo>
-                  <a:lnTo>
-                    <a:pt x="501357" y="1816507"/>
-                  </a:lnTo>
-                  <a:lnTo>
-                    <a:pt x="429735" y="1813721"/>
-                  </a:lnTo>
-                  <a:lnTo>
-                    <a:pt x="358112" y="1810927"/>
-                  </a:lnTo>
-                  <a:lnTo>
-                    <a:pt x="286490" y="1808126"/>
-                  </a:lnTo>
-                  <a:lnTo>
-                    <a:pt x="214867" y="1805316"/>
-                  </a:lnTo>
-                  <a:lnTo>
-                    <a:pt x="143245" y="1802498"/>
-                  </a:lnTo>
-                  <a:lnTo>
-                    <a:pt x="71622" y="1799673"/>
-                  </a:lnTo>
-                  <a:lnTo>
-                    <a:pt x="0" y="1796839"/>
+                    <a:pt x="71622" y="50938"/>
+                  </a:lnTo>
+                  <a:lnTo>
+                    <a:pt x="143245" y="100952"/>
+                  </a:lnTo>
+                  <a:lnTo>
+                    <a:pt x="214867" y="150058"/>
+                  </a:lnTo>
+                  <a:lnTo>
+                    <a:pt x="286490" y="198273"/>
+                  </a:lnTo>
+                  <a:lnTo>
+                    <a:pt x="358112" y="245613"/>
+                  </a:lnTo>
+                  <a:lnTo>
+                    <a:pt x="429735" y="292093"/>
+                  </a:lnTo>
+                  <a:lnTo>
+                    <a:pt x="501357" y="337730"/>
+                  </a:lnTo>
+                  <a:lnTo>
+                    <a:pt x="572980" y="382538"/>
+                  </a:lnTo>
+                  <a:lnTo>
+                    <a:pt x="644602" y="426533"/>
+                  </a:lnTo>
+                  <a:lnTo>
+                    <a:pt x="716225" y="469730"/>
+                  </a:lnTo>
+                  <a:lnTo>
+                    <a:pt x="787847" y="512142"/>
+                  </a:lnTo>
+                  <a:lnTo>
+                    <a:pt x="859470" y="553785"/>
+                  </a:lnTo>
+                  <a:lnTo>
+                    <a:pt x="931092" y="594671"/>
+                  </a:lnTo>
+                  <a:lnTo>
+                    <a:pt x="1002715" y="634816"/>
+                  </a:lnTo>
+                  <a:lnTo>
+                    <a:pt x="1074337" y="674232"/>
+                  </a:lnTo>
+                  <a:lnTo>
+                    <a:pt x="1145960" y="712932"/>
+                  </a:lnTo>
+                  <a:lnTo>
+                    <a:pt x="1217582" y="750930"/>
+                  </a:lnTo>
+                  <a:lnTo>
+                    <a:pt x="1289205" y="788239"/>
+                  </a:lnTo>
+                  <a:lnTo>
+                    <a:pt x="1360827" y="824870"/>
+                  </a:lnTo>
+                  <a:lnTo>
+                    <a:pt x="1432450" y="860836"/>
+                  </a:lnTo>
+                  <a:lnTo>
+                    <a:pt x="1504073" y="896149"/>
+                  </a:lnTo>
+                  <a:lnTo>
+                    <a:pt x="1575695" y="930822"/>
+                  </a:lnTo>
+                  <a:lnTo>
+                    <a:pt x="1647318" y="964865"/>
+                  </a:lnTo>
+                  <a:lnTo>
+                    <a:pt x="1718940" y="998290"/>
+                  </a:lnTo>
+                  <a:lnTo>
+                    <a:pt x="1790563" y="1031108"/>
+                  </a:lnTo>
+                  <a:lnTo>
+                    <a:pt x="1862185" y="1063331"/>
+                  </a:lnTo>
+                  <a:lnTo>
+                    <a:pt x="1933808" y="1094969"/>
+                  </a:lnTo>
+                  <a:lnTo>
+                    <a:pt x="2005430" y="1126032"/>
+                  </a:lnTo>
+                  <a:lnTo>
+                    <a:pt x="2077053" y="1156532"/>
+                  </a:lnTo>
+                  <a:lnTo>
+                    <a:pt x="2148675" y="1186478"/>
+                  </a:lnTo>
+                  <a:lnTo>
+                    <a:pt x="2220298" y="1215881"/>
+                  </a:lnTo>
+                  <a:lnTo>
+                    <a:pt x="2291920" y="1244750"/>
+                  </a:lnTo>
+                  <a:lnTo>
+                    <a:pt x="2363543" y="1273094"/>
+                  </a:lnTo>
+                  <a:lnTo>
+                    <a:pt x="2435165" y="1300925"/>
+                  </a:lnTo>
+                  <a:lnTo>
+                    <a:pt x="2506788" y="1328250"/>
+                  </a:lnTo>
+                  <a:lnTo>
+                    <a:pt x="2578410" y="1355079"/>
+                  </a:lnTo>
+                  <a:lnTo>
+                    <a:pt x="2650033" y="1381422"/>
+                  </a:lnTo>
+                  <a:lnTo>
+                    <a:pt x="2721655" y="1407286"/>
+                  </a:lnTo>
+                  <a:lnTo>
+                    <a:pt x="2793278" y="1432680"/>
+                  </a:lnTo>
+                  <a:lnTo>
+                    <a:pt x="2864901" y="1457614"/>
+                  </a:lnTo>
+                  <a:lnTo>
+                    <a:pt x="2936523" y="1482095"/>
+                  </a:lnTo>
+                  <a:lnTo>
+                    <a:pt x="3008146" y="1506132"/>
+                  </a:lnTo>
+                  <a:lnTo>
+                    <a:pt x="3079768" y="1529732"/>
+                  </a:lnTo>
+                  <a:lnTo>
+                    <a:pt x="3151391" y="1552904"/>
+                  </a:lnTo>
+                  <a:lnTo>
+                    <a:pt x="3223013" y="1575656"/>
+                  </a:lnTo>
+                  <a:lnTo>
+                    <a:pt x="3294636" y="1597994"/>
+                  </a:lnTo>
+                  <a:lnTo>
+                    <a:pt x="3366258" y="1619927"/>
+                  </a:lnTo>
+                  <a:lnTo>
+                    <a:pt x="3437881" y="1641462"/>
+                  </a:lnTo>
+                  <a:lnTo>
+                    <a:pt x="3509503" y="1662606"/>
+                  </a:lnTo>
+                  <a:lnTo>
+                    <a:pt x="3581126" y="1683367"/>
+                  </a:lnTo>
+                  <a:lnTo>
+                    <a:pt x="3652748" y="1703750"/>
+                  </a:lnTo>
+                  <a:lnTo>
+                    <a:pt x="3724371" y="1723764"/>
+                  </a:lnTo>
+                  <a:lnTo>
+                    <a:pt x="3795993" y="1743414"/>
+                  </a:lnTo>
+                  <a:lnTo>
+                    <a:pt x="3867616" y="1762707"/>
+                  </a:lnTo>
+                  <a:lnTo>
+                    <a:pt x="3939238" y="1781650"/>
+                  </a:lnTo>
+                  <a:lnTo>
+                    <a:pt x="4010861" y="1800250"/>
+                  </a:lnTo>
+                  <a:lnTo>
+                    <a:pt x="4082483" y="1818512"/>
+                  </a:lnTo>
+                  <a:lnTo>
+                    <a:pt x="4154106" y="1836442"/>
+                  </a:lnTo>
+                  <a:lnTo>
+                    <a:pt x="4225729" y="1854047"/>
+                  </a:lnTo>
+                  <a:lnTo>
+                    <a:pt x="4297351" y="1871333"/>
+                  </a:lnTo>
+                  <a:lnTo>
+                    <a:pt x="4368974" y="1888304"/>
+                  </a:lnTo>
+                  <a:lnTo>
+                    <a:pt x="4440596" y="1904968"/>
+                  </a:lnTo>
+                  <a:lnTo>
+                    <a:pt x="4512219" y="1921329"/>
+                  </a:lnTo>
+                  <a:lnTo>
+                    <a:pt x="4583841" y="1937393"/>
+                  </a:lnTo>
+                  <a:lnTo>
+                    <a:pt x="4655464" y="1953165"/>
+                  </a:lnTo>
+                  <a:lnTo>
+                    <a:pt x="4727086" y="1968652"/>
+                  </a:lnTo>
+                  <a:lnTo>
+                    <a:pt x="4798709" y="1977977"/>
+                  </a:lnTo>
+                  <a:lnTo>
+                    <a:pt x="4870331" y="1980346"/>
+                  </a:lnTo>
+                  <a:lnTo>
+                    <a:pt x="4941954" y="1982708"/>
+                  </a:lnTo>
+                  <a:lnTo>
+                    <a:pt x="5013576" y="1985064"/>
+                  </a:lnTo>
+                  <a:lnTo>
+                    <a:pt x="5085199" y="1987413"/>
+                  </a:lnTo>
+                  <a:lnTo>
+                    <a:pt x="5156821" y="1989755"/>
+                  </a:lnTo>
+                  <a:lnTo>
+                    <a:pt x="5228444" y="1992090"/>
+                  </a:lnTo>
+                  <a:lnTo>
+                    <a:pt x="5300066" y="1994419"/>
+                  </a:lnTo>
+                  <a:lnTo>
+                    <a:pt x="5371689" y="1996741"/>
+                  </a:lnTo>
+                  <a:lnTo>
+                    <a:pt x="5443311" y="1999057"/>
+                  </a:lnTo>
+                  <a:lnTo>
+                    <a:pt x="5514934" y="2001365"/>
+                  </a:lnTo>
+                  <a:lnTo>
+                    <a:pt x="5586557" y="2003668"/>
+                  </a:lnTo>
+                  <a:lnTo>
+                    <a:pt x="5658179" y="2005963"/>
+                  </a:lnTo>
+                  <a:lnTo>
+                    <a:pt x="5729802" y="2008252"/>
+                  </a:lnTo>
+                  <a:lnTo>
+                    <a:pt x="5801424" y="2010535"/>
+                  </a:lnTo>
+                  <a:lnTo>
+                    <a:pt x="5873047" y="2012811"/>
+                  </a:lnTo>
+                  <a:lnTo>
+                    <a:pt x="5944669" y="2015080"/>
+                  </a:lnTo>
+                  <a:lnTo>
+                    <a:pt x="6016292" y="2017343"/>
+                  </a:lnTo>
+                  <a:lnTo>
+                    <a:pt x="6087914" y="2019600"/>
+                  </a:lnTo>
+                  <a:lnTo>
+                    <a:pt x="6159537" y="2021850"/>
+                  </a:lnTo>
+                  <a:lnTo>
+                    <a:pt x="6231159" y="2024094"/>
+                  </a:lnTo>
+                  <a:lnTo>
+                    <a:pt x="6302782" y="2026331"/>
+                  </a:lnTo>
+                  <a:lnTo>
+                    <a:pt x="6374404" y="2028562"/>
+                  </a:lnTo>
+                  <a:lnTo>
+                    <a:pt x="6446027" y="2030786"/>
+                  </a:lnTo>
+                  <a:lnTo>
+                    <a:pt x="6517649" y="2033004"/>
+                  </a:lnTo>
+                  <a:lnTo>
+                    <a:pt x="6589272" y="2035216"/>
+                  </a:lnTo>
+                  <a:lnTo>
+                    <a:pt x="6660894" y="2037421"/>
+                  </a:lnTo>
+                  <a:lnTo>
+                    <a:pt x="6732517" y="2039621"/>
+                  </a:lnTo>
+                  <a:lnTo>
+                    <a:pt x="6804139" y="2041813"/>
+                  </a:lnTo>
+                  <a:lnTo>
+                    <a:pt x="6875762" y="2044000"/>
+                  </a:lnTo>
+                  <a:lnTo>
+                    <a:pt x="6947385" y="2046180"/>
+                  </a:lnTo>
+                  <a:lnTo>
+                    <a:pt x="7019007" y="2048354"/>
+                  </a:lnTo>
+                  <a:lnTo>
+                    <a:pt x="7090630" y="2050522"/>
+                  </a:lnTo>
+                  <a:lnTo>
+                    <a:pt x="7090630" y="2348670"/>
+                  </a:lnTo>
+                  <a:lnTo>
+                    <a:pt x="7019007" y="2340210"/>
+                  </a:lnTo>
+                  <a:lnTo>
+                    <a:pt x="6947385" y="2331592"/>
+                  </a:lnTo>
+                  <a:lnTo>
+                    <a:pt x="6875762" y="2322816"/>
+                  </a:lnTo>
+                  <a:lnTo>
+                    <a:pt x="6804139" y="2313877"/>
+                  </a:lnTo>
+                  <a:lnTo>
+                    <a:pt x="6732517" y="2304772"/>
+                  </a:lnTo>
+                  <a:lnTo>
+                    <a:pt x="6660894" y="2295500"/>
+                  </a:lnTo>
+                  <a:lnTo>
+                    <a:pt x="6589272" y="2286056"/>
+                  </a:lnTo>
+                  <a:lnTo>
+                    <a:pt x="6517649" y="2276438"/>
+                  </a:lnTo>
+                  <a:lnTo>
+                    <a:pt x="6446027" y="2266641"/>
+                  </a:lnTo>
+                  <a:lnTo>
+                    <a:pt x="6374404" y="2256664"/>
+                  </a:lnTo>
+                  <a:lnTo>
+                    <a:pt x="6302782" y="2246502"/>
+                  </a:lnTo>
+                  <a:lnTo>
+                    <a:pt x="6231159" y="2236152"/>
+                  </a:lnTo>
+                  <a:lnTo>
+                    <a:pt x="6159537" y="2225611"/>
+                  </a:lnTo>
+                  <a:lnTo>
+                    <a:pt x="6087914" y="2214875"/>
+                  </a:lnTo>
+                  <a:lnTo>
+                    <a:pt x="6016292" y="2203941"/>
+                  </a:lnTo>
+                  <a:lnTo>
+                    <a:pt x="5944669" y="2192805"/>
+                  </a:lnTo>
+                  <a:lnTo>
+                    <a:pt x="5873047" y="2181462"/>
+                  </a:lnTo>
+                  <a:lnTo>
+                    <a:pt x="5801424" y="2169910"/>
+                  </a:lnTo>
+                  <a:lnTo>
+                    <a:pt x="5729802" y="2158144"/>
+                  </a:lnTo>
+                  <a:lnTo>
+                    <a:pt x="5658179" y="2146161"/>
+                  </a:lnTo>
+                  <a:lnTo>
+                    <a:pt x="5586557" y="2133957"/>
+                  </a:lnTo>
+                  <a:lnTo>
+                    <a:pt x="5514934" y="2121526"/>
+                  </a:lnTo>
+                  <a:lnTo>
+                    <a:pt x="5443311" y="2108866"/>
+                  </a:lnTo>
+                  <a:lnTo>
+                    <a:pt x="5371689" y="2095972"/>
+                  </a:lnTo>
+                  <a:lnTo>
+                    <a:pt x="5300066" y="2082840"/>
+                  </a:lnTo>
+                  <a:lnTo>
+                    <a:pt x="5228444" y="2069464"/>
+                  </a:lnTo>
+                  <a:lnTo>
+                    <a:pt x="5156821" y="2055842"/>
+                  </a:lnTo>
+                  <a:lnTo>
+                    <a:pt x="5085199" y="2041967"/>
+                  </a:lnTo>
+                  <a:lnTo>
+                    <a:pt x="5013576" y="2027836"/>
+                  </a:lnTo>
+                  <a:lnTo>
+                    <a:pt x="4941954" y="2013444"/>
+                  </a:lnTo>
+                  <a:lnTo>
+                    <a:pt x="4870331" y="1998786"/>
+                  </a:lnTo>
+                  <a:lnTo>
+                    <a:pt x="4798709" y="1983857"/>
+                  </a:lnTo>
+                  <a:lnTo>
+                    <a:pt x="4727086" y="1975601"/>
+                  </a:lnTo>
+                  <a:lnTo>
+                    <a:pt x="4655464" y="1973218"/>
+                  </a:lnTo>
+                  <a:lnTo>
+                    <a:pt x="4583841" y="1970829"/>
+                  </a:lnTo>
+                  <a:lnTo>
+                    <a:pt x="4512219" y="1968432"/>
+                  </a:lnTo>
+                  <a:lnTo>
+                    <a:pt x="4440596" y="1966029"/>
+                  </a:lnTo>
+                  <a:lnTo>
+                    <a:pt x="4368974" y="1963619"/>
+                  </a:lnTo>
+                  <a:lnTo>
+                    <a:pt x="4297351" y="1961202"/>
+                  </a:lnTo>
+                  <a:lnTo>
+                    <a:pt x="4225729" y="1958778"/>
+                  </a:lnTo>
+                  <a:lnTo>
+                    <a:pt x="4154106" y="1956347"/>
+                  </a:lnTo>
+                  <a:lnTo>
+                    <a:pt x="4082483" y="1953909"/>
+                  </a:lnTo>
+                  <a:lnTo>
+                    <a:pt x="4010861" y="1951464"/>
+                  </a:lnTo>
+                  <a:lnTo>
+                    <a:pt x="3939238" y="1949012"/>
+                  </a:lnTo>
+                  <a:lnTo>
+                    <a:pt x="3867616" y="1946553"/>
+                  </a:lnTo>
+                  <a:lnTo>
+                    <a:pt x="3795993" y="1944087"/>
+                  </a:lnTo>
+                  <a:lnTo>
+                    <a:pt x="3724371" y="1941614"/>
+                  </a:lnTo>
+                  <a:lnTo>
+                    <a:pt x="3652748" y="1939133"/>
+                  </a:lnTo>
+                  <a:lnTo>
+                    <a:pt x="3581126" y="1936646"/>
+                  </a:lnTo>
+                  <a:lnTo>
+                    <a:pt x="3509503" y="1934152"/>
+                  </a:lnTo>
+                  <a:lnTo>
+                    <a:pt x="3437881" y="1931650"/>
+                  </a:lnTo>
+                  <a:lnTo>
+                    <a:pt x="3366258" y="1929141"/>
+                  </a:lnTo>
+                  <a:lnTo>
+                    <a:pt x="3294636" y="1926625"/>
+                  </a:lnTo>
+                  <a:lnTo>
+                    <a:pt x="3223013" y="1924102"/>
+                  </a:lnTo>
+                  <a:lnTo>
+                    <a:pt x="3151391" y="1921571"/>
+                  </a:lnTo>
+                  <a:lnTo>
+                    <a:pt x="3079768" y="1919034"/>
+                  </a:lnTo>
+                  <a:lnTo>
+                    <a:pt x="3008146" y="1916489"/>
+                  </a:lnTo>
+                  <a:lnTo>
+                    <a:pt x="2936523" y="1913937"/>
+                  </a:lnTo>
+                  <a:lnTo>
+                    <a:pt x="2864901" y="1911377"/>
+                  </a:lnTo>
+                  <a:lnTo>
+                    <a:pt x="2793278" y="1908810"/>
+                  </a:lnTo>
+                  <a:lnTo>
+                    <a:pt x="2721655" y="1906236"/>
+                  </a:lnTo>
+                  <a:lnTo>
+                    <a:pt x="2650033" y="1903654"/>
+                  </a:lnTo>
+                  <a:lnTo>
+                    <a:pt x="2578410" y="1901065"/>
+                  </a:lnTo>
+                  <a:lnTo>
+                    <a:pt x="2506788" y="1898468"/>
+                  </a:lnTo>
+                  <a:lnTo>
+                    <a:pt x="2435165" y="1895864"/>
+                  </a:lnTo>
+                  <a:lnTo>
+                    <a:pt x="2363543" y="1893253"/>
+                  </a:lnTo>
+                  <a:lnTo>
+                    <a:pt x="2291920" y="1890634"/>
+                  </a:lnTo>
+                  <a:lnTo>
+                    <a:pt x="2220298" y="1888008"/>
+                  </a:lnTo>
+                  <a:lnTo>
+                    <a:pt x="2148675" y="1885374"/>
+                  </a:lnTo>
+                  <a:lnTo>
+                    <a:pt x="2077053" y="1882732"/>
+                  </a:lnTo>
+                  <a:lnTo>
+                    <a:pt x="2005430" y="1880083"/>
+                  </a:lnTo>
+                  <a:lnTo>
+                    <a:pt x="1933808" y="1877426"/>
+                  </a:lnTo>
+                  <a:lnTo>
+                    <a:pt x="1862185" y="1874762"/>
+                  </a:lnTo>
+                  <a:lnTo>
+                    <a:pt x="1790563" y="1872090"/>
+                  </a:lnTo>
+                  <a:lnTo>
+                    <a:pt x="1718940" y="1869410"/>
+                  </a:lnTo>
+                  <a:lnTo>
+                    <a:pt x="1647318" y="1866723"/>
+                  </a:lnTo>
+                  <a:lnTo>
+                    <a:pt x="1575695" y="1864028"/>
+                  </a:lnTo>
+                  <a:lnTo>
+                    <a:pt x="1504073" y="1861325"/>
+                  </a:lnTo>
+                  <a:lnTo>
+                    <a:pt x="1432450" y="1858615"/>
+                  </a:lnTo>
+                  <a:lnTo>
+                    <a:pt x="1360827" y="1855897"/>
+                  </a:lnTo>
+                  <a:lnTo>
+                    <a:pt x="1289205" y="1853171"/>
+                  </a:lnTo>
+                  <a:lnTo>
+                    <a:pt x="1217582" y="1850437"/>
+                  </a:lnTo>
+                  <a:lnTo>
+                    <a:pt x="1145960" y="1847695"/>
+                  </a:lnTo>
+                  <a:lnTo>
+                    <a:pt x="1074337" y="1844945"/>
+                  </a:lnTo>
+                  <a:lnTo>
+                    <a:pt x="1002715" y="1842188"/>
+                  </a:lnTo>
+                  <a:lnTo>
+                    <a:pt x="931092" y="1839422"/>
+                  </a:lnTo>
+                  <a:lnTo>
+                    <a:pt x="859470" y="1836649"/>
+                  </a:lnTo>
+                  <a:lnTo>
+                    <a:pt x="787847" y="1833868"/>
+                  </a:lnTo>
+                  <a:lnTo>
+                    <a:pt x="716225" y="1831079"/>
+                  </a:lnTo>
+                  <a:lnTo>
+                    <a:pt x="644602" y="1828281"/>
+                  </a:lnTo>
+                  <a:lnTo>
+                    <a:pt x="572980" y="1825476"/>
+                  </a:lnTo>
+                  <a:lnTo>
+                    <a:pt x="501357" y="1822663"/>
+                  </a:lnTo>
+                  <a:lnTo>
+                    <a:pt x="429735" y="1819841"/>
+                  </a:lnTo>
+                  <a:lnTo>
+                    <a:pt x="358112" y="1817012"/>
+                  </a:lnTo>
+                  <a:lnTo>
+                    <a:pt x="286490" y="1814174"/>
+                  </a:lnTo>
+                  <a:lnTo>
+                    <a:pt x="214867" y="1811329"/>
+                  </a:lnTo>
+                  <a:lnTo>
+                    <a:pt x="143245" y="1808475"/>
+                  </a:lnTo>
+                  <a:lnTo>
+                    <a:pt x="71622" y="1805613"/>
+                  </a:lnTo>
+                  <a:lnTo>
+                    <a:pt x="0" y="1802742"/>
                   </a:lnTo>
                   <a:close/>
                 </a:path>
@@ -3676,312 +3676,312 @@
           </p:nvSpPr>
           <p:spPr>
             <a:xfrm>
-              <a:off x="1172049" y="2758862"/>
-              <a:ext cx="7090630" cy="2041807"/>
+              <a:off x="1172049" y="2750903"/>
+              <a:ext cx="7090630" cy="2050522"/>
             </a:xfrm>
             <a:custGeom>
               <a:avLst/>
               <a:pathLst>
-                <a:path w="7090630" h="2041807">
+                <a:path w="7090630" h="2050522">
                   <a:moveTo>
                     <a:pt x="0" y="0"/>
                   </a:moveTo>
                   <a:lnTo>
-                    <a:pt x="71622" y="50676"/>
-                  </a:lnTo>
-                  <a:lnTo>
-                    <a:pt x="143245" y="100435"/>
-                  </a:lnTo>
-                  <a:lnTo>
-                    <a:pt x="214867" y="149293"/>
-                  </a:lnTo>
-                  <a:lnTo>
-                    <a:pt x="286490" y="197267"/>
-                  </a:lnTo>
-                  <a:lnTo>
-                    <a:pt x="358112" y="244371"/>
-                  </a:lnTo>
-                  <a:lnTo>
-                    <a:pt x="429735" y="290623"/>
-                  </a:lnTo>
-                  <a:lnTo>
-                    <a:pt x="501357" y="336036"/>
-                  </a:lnTo>
-                  <a:lnTo>
-                    <a:pt x="572980" y="380628"/>
-                  </a:lnTo>
-                  <a:lnTo>
-                    <a:pt x="644602" y="424412"/>
-                  </a:lnTo>
-                  <a:lnTo>
-                    <a:pt x="716225" y="467403"/>
-                  </a:lnTo>
-                  <a:lnTo>
-                    <a:pt x="787847" y="509615"/>
-                  </a:lnTo>
-                  <a:lnTo>
-                    <a:pt x="859470" y="551063"/>
-                  </a:lnTo>
-                  <a:lnTo>
-                    <a:pt x="931092" y="591761"/>
-                  </a:lnTo>
-                  <a:lnTo>
-                    <a:pt x="1002715" y="631721"/>
-                  </a:lnTo>
-                  <a:lnTo>
-                    <a:pt x="1074337" y="670958"/>
-                  </a:lnTo>
-                  <a:lnTo>
-                    <a:pt x="1145960" y="709484"/>
-                  </a:lnTo>
-                  <a:lnTo>
-                    <a:pt x="1217582" y="747313"/>
-                  </a:lnTo>
-                  <a:lnTo>
-                    <a:pt x="1289205" y="784456"/>
-                  </a:lnTo>
-                  <a:lnTo>
-                    <a:pt x="1360827" y="820927"/>
-                  </a:lnTo>
-                  <a:lnTo>
-                    <a:pt x="1432450" y="856738"/>
-                  </a:lnTo>
-                  <a:lnTo>
-                    <a:pt x="1504073" y="891900"/>
-                  </a:lnTo>
-                  <a:lnTo>
-                    <a:pt x="1575695" y="926425"/>
-                  </a:lnTo>
-                  <a:lnTo>
-                    <a:pt x="1647318" y="960325"/>
-                  </a:lnTo>
-                  <a:lnTo>
-                    <a:pt x="1718940" y="993611"/>
-                  </a:lnTo>
-                  <a:lnTo>
-                    <a:pt x="1790563" y="1026294"/>
-                  </a:lnTo>
-                  <a:lnTo>
-                    <a:pt x="1862185" y="1058385"/>
-                  </a:lnTo>
-                  <a:lnTo>
-                    <a:pt x="1933808" y="1089896"/>
-                  </a:lnTo>
-                  <a:lnTo>
-                    <a:pt x="2005430" y="1120835"/>
-                  </a:lnTo>
-                  <a:lnTo>
-                    <a:pt x="2077053" y="1151214"/>
-                  </a:lnTo>
-                  <a:lnTo>
-                    <a:pt x="2148675" y="1181044"/>
-                  </a:lnTo>
-                  <a:lnTo>
-                    <a:pt x="2220298" y="1210332"/>
-                  </a:lnTo>
-                  <a:lnTo>
-                    <a:pt x="2291920" y="1239091"/>
-                  </a:lnTo>
-                  <a:lnTo>
-                    <a:pt x="2363543" y="1267329"/>
-                  </a:lnTo>
-                  <a:lnTo>
-                    <a:pt x="2435165" y="1295055"/>
-                  </a:lnTo>
-                  <a:lnTo>
-                    <a:pt x="2506788" y="1322279"/>
-                  </a:lnTo>
-                  <a:lnTo>
-                    <a:pt x="2578410" y="1349011"/>
-                  </a:lnTo>
-                  <a:lnTo>
-                    <a:pt x="2650033" y="1375258"/>
-                  </a:lnTo>
-                  <a:lnTo>
-                    <a:pt x="2721655" y="1401030"/>
-                  </a:lnTo>
-                  <a:lnTo>
-                    <a:pt x="2793278" y="1426335"/>
-                  </a:lnTo>
-                  <a:lnTo>
-                    <a:pt x="2864901" y="1451182"/>
-                  </a:lnTo>
-                  <a:lnTo>
-                    <a:pt x="2936523" y="1475579"/>
-                  </a:lnTo>
-                  <a:lnTo>
-                    <a:pt x="3008146" y="1499534"/>
-                  </a:lnTo>
-                  <a:lnTo>
-                    <a:pt x="3079768" y="1523055"/>
-                  </a:lnTo>
-                  <a:lnTo>
-                    <a:pt x="3151391" y="1546151"/>
-                  </a:lnTo>
-                  <a:lnTo>
-                    <a:pt x="3223013" y="1568828"/>
-                  </a:lnTo>
-                  <a:lnTo>
-                    <a:pt x="3294636" y="1591094"/>
-                  </a:lnTo>
-                  <a:lnTo>
-                    <a:pt x="3366258" y="1612957"/>
-                  </a:lnTo>
-                  <a:lnTo>
-                    <a:pt x="3437881" y="1634425"/>
-                  </a:lnTo>
-                  <a:lnTo>
-                    <a:pt x="3509503" y="1655503"/>
-                  </a:lnTo>
-                  <a:lnTo>
-                    <a:pt x="3581126" y="1676200"/>
-                  </a:lnTo>
-                  <a:lnTo>
-                    <a:pt x="3652748" y="1696522"/>
-                  </a:lnTo>
-                  <a:lnTo>
-                    <a:pt x="3724371" y="1716476"/>
-                  </a:lnTo>
-                  <a:lnTo>
-                    <a:pt x="3795993" y="1736069"/>
-                  </a:lnTo>
-                  <a:lnTo>
-                    <a:pt x="3867616" y="1755307"/>
-                  </a:lnTo>
-                  <a:lnTo>
-                    <a:pt x="3939238" y="1774196"/>
-                  </a:lnTo>
-                  <a:lnTo>
-                    <a:pt x="4010861" y="1792743"/>
-                  </a:lnTo>
-                  <a:lnTo>
-                    <a:pt x="4082483" y="1810955"/>
-                  </a:lnTo>
-                  <a:lnTo>
-                    <a:pt x="4154106" y="1828837"/>
-                  </a:lnTo>
-                  <a:lnTo>
-                    <a:pt x="4225729" y="1846394"/>
-                  </a:lnTo>
-                  <a:lnTo>
-                    <a:pt x="4297351" y="1863634"/>
-                  </a:lnTo>
-                  <a:lnTo>
-                    <a:pt x="4368974" y="1880562"/>
-                  </a:lnTo>
-                  <a:lnTo>
-                    <a:pt x="4440596" y="1897183"/>
-                  </a:lnTo>
-                  <a:lnTo>
-                    <a:pt x="4512219" y="1913503"/>
-                  </a:lnTo>
-                  <a:lnTo>
-                    <a:pt x="4583841" y="1929528"/>
-                  </a:lnTo>
-                  <a:lnTo>
-                    <a:pt x="4655464" y="1945262"/>
-                  </a:lnTo>
-                  <a:lnTo>
-                    <a:pt x="4727086" y="1960712"/>
-                  </a:lnTo>
-                  <a:lnTo>
-                    <a:pt x="4798709" y="1970006"/>
-                  </a:lnTo>
-                  <a:lnTo>
-                    <a:pt x="4870331" y="1972350"/>
-                  </a:lnTo>
-                  <a:lnTo>
-                    <a:pt x="4941954" y="1974687"/>
-                  </a:lnTo>
-                  <a:lnTo>
-                    <a:pt x="5013576" y="1977017"/>
-                  </a:lnTo>
-                  <a:lnTo>
-                    <a:pt x="5085199" y="1979341"/>
-                  </a:lnTo>
-                  <a:lnTo>
-                    <a:pt x="5156821" y="1981658"/>
-                  </a:lnTo>
-                  <a:lnTo>
-                    <a:pt x="5228444" y="1983969"/>
-                  </a:lnTo>
-                  <a:lnTo>
-                    <a:pt x="5300066" y="1986273"/>
-                  </a:lnTo>
-                  <a:lnTo>
-                    <a:pt x="5371689" y="1988571"/>
-                  </a:lnTo>
-                  <a:lnTo>
-                    <a:pt x="5443311" y="1990862"/>
-                  </a:lnTo>
-                  <a:lnTo>
-                    <a:pt x="5514934" y="1993147"/>
-                  </a:lnTo>
-                  <a:lnTo>
-                    <a:pt x="5586557" y="1995425"/>
-                  </a:lnTo>
-                  <a:lnTo>
-                    <a:pt x="5658179" y="1997697"/>
-                  </a:lnTo>
-                  <a:lnTo>
-                    <a:pt x="5729802" y="1999962"/>
-                  </a:lnTo>
-                  <a:lnTo>
-                    <a:pt x="5801424" y="2002221"/>
-                  </a:lnTo>
-                  <a:lnTo>
-                    <a:pt x="5873047" y="2004474"/>
-                  </a:lnTo>
-                  <a:lnTo>
-                    <a:pt x="5944669" y="2006720"/>
-                  </a:lnTo>
-                  <a:lnTo>
-                    <a:pt x="6016292" y="2008960"/>
-                  </a:lnTo>
-                  <a:lnTo>
-                    <a:pt x="6087914" y="2011193"/>
-                  </a:lnTo>
-                  <a:lnTo>
-                    <a:pt x="6159537" y="2013420"/>
-                  </a:lnTo>
-                  <a:lnTo>
-                    <a:pt x="6231159" y="2015641"/>
-                  </a:lnTo>
-                  <a:lnTo>
-                    <a:pt x="6302782" y="2017856"/>
-                  </a:lnTo>
-                  <a:lnTo>
-                    <a:pt x="6374404" y="2020064"/>
-                  </a:lnTo>
-                  <a:lnTo>
-                    <a:pt x="6446027" y="2022266"/>
-                  </a:lnTo>
-                  <a:lnTo>
-                    <a:pt x="6517649" y="2024462"/>
-                  </a:lnTo>
-                  <a:lnTo>
-                    <a:pt x="6589272" y="2026652"/>
-                  </a:lnTo>
-                  <a:lnTo>
-                    <a:pt x="6660894" y="2028835"/>
-                  </a:lnTo>
-                  <a:lnTo>
-                    <a:pt x="6732517" y="2031012"/>
-                  </a:lnTo>
-                  <a:lnTo>
-                    <a:pt x="6804139" y="2033184"/>
-                  </a:lnTo>
-                  <a:lnTo>
-                    <a:pt x="6875762" y="2035348"/>
-                  </a:lnTo>
-                  <a:lnTo>
-                    <a:pt x="6947385" y="2037507"/>
-                  </a:lnTo>
-                  <a:lnTo>
-                    <a:pt x="7019007" y="2039660"/>
-                  </a:lnTo>
-                  <a:lnTo>
-                    <a:pt x="7090630" y="2041807"/>
+                    <a:pt x="71622" y="50938"/>
+                  </a:lnTo>
+                  <a:lnTo>
+                    <a:pt x="143245" y="100952"/>
+                  </a:lnTo>
+                  <a:lnTo>
+                    <a:pt x="214867" y="150058"/>
+                  </a:lnTo>
+                  <a:lnTo>
+                    <a:pt x="286490" y="198273"/>
+                  </a:lnTo>
+                  <a:lnTo>
+                    <a:pt x="358112" y="245613"/>
+                  </a:lnTo>
+                  <a:lnTo>
+                    <a:pt x="429735" y="292093"/>
+                  </a:lnTo>
+                  <a:lnTo>
+                    <a:pt x="501357" y="337730"/>
+                  </a:lnTo>
+                  <a:lnTo>
+                    <a:pt x="572980" y="382538"/>
+                  </a:lnTo>
+                  <a:lnTo>
+                    <a:pt x="644602" y="426533"/>
+                  </a:lnTo>
+                  <a:lnTo>
+                    <a:pt x="716225" y="469730"/>
+                  </a:lnTo>
+                  <a:lnTo>
+                    <a:pt x="787847" y="512142"/>
+                  </a:lnTo>
+                  <a:lnTo>
+                    <a:pt x="859470" y="553785"/>
+                  </a:lnTo>
+                  <a:lnTo>
+                    <a:pt x="931092" y="594671"/>
+                  </a:lnTo>
+                  <a:lnTo>
+                    <a:pt x="1002715" y="634816"/>
+                  </a:lnTo>
+                  <a:lnTo>
+                    <a:pt x="1074337" y="674232"/>
+                  </a:lnTo>
+                  <a:lnTo>
+                    <a:pt x="1145960" y="712932"/>
+                  </a:lnTo>
+                  <a:lnTo>
+                    <a:pt x="1217582" y="750930"/>
+                  </a:lnTo>
+                  <a:lnTo>
+                    <a:pt x="1289205" y="788239"/>
+                  </a:lnTo>
+                  <a:lnTo>
+                    <a:pt x="1360827" y="824870"/>
+                  </a:lnTo>
+                  <a:lnTo>
+                    <a:pt x="1432450" y="860836"/>
+                  </a:lnTo>
+                  <a:lnTo>
+                    <a:pt x="1504073" y="896149"/>
+                  </a:lnTo>
+                  <a:lnTo>
+                    <a:pt x="1575695" y="930822"/>
+                  </a:lnTo>
+                  <a:lnTo>
+                    <a:pt x="1647318" y="964865"/>
+                  </a:lnTo>
+                  <a:lnTo>
+                    <a:pt x="1718940" y="998290"/>
+                  </a:lnTo>
+                  <a:lnTo>
+                    <a:pt x="1790563" y="1031108"/>
+                  </a:lnTo>
+                  <a:lnTo>
+                    <a:pt x="1862185" y="1063331"/>
+                  </a:lnTo>
+                  <a:lnTo>
+                    <a:pt x="1933808" y="1094969"/>
+                  </a:lnTo>
+                  <a:lnTo>
+                    <a:pt x="2005430" y="1126032"/>
+                  </a:lnTo>
+                  <a:lnTo>
+                    <a:pt x="2077053" y="1156532"/>
+                  </a:lnTo>
+                  <a:lnTo>
+                    <a:pt x="2148675" y="1186478"/>
+                  </a:lnTo>
+                  <a:lnTo>
+                    <a:pt x="2220298" y="1215881"/>
+                  </a:lnTo>
+                  <a:lnTo>
+                    <a:pt x="2291920" y="1244750"/>
+                  </a:lnTo>
+                  <a:lnTo>
+                    <a:pt x="2363543" y="1273094"/>
+                  </a:lnTo>
+                  <a:lnTo>
+                    <a:pt x="2435165" y="1300925"/>
+                  </a:lnTo>
+                  <a:lnTo>
+                    <a:pt x="2506788" y="1328250"/>
+                  </a:lnTo>
+                  <a:lnTo>
+                    <a:pt x="2578410" y="1355079"/>
+                  </a:lnTo>
+                  <a:lnTo>
+                    <a:pt x="2650033" y="1381422"/>
+                  </a:lnTo>
+                  <a:lnTo>
+                    <a:pt x="2721655" y="1407286"/>
+                  </a:lnTo>
+                  <a:lnTo>
+                    <a:pt x="2793278" y="1432680"/>
+                  </a:lnTo>
+                  <a:lnTo>
+                    <a:pt x="2864901" y="1457614"/>
+                  </a:lnTo>
+                  <a:lnTo>
+                    <a:pt x="2936523" y="1482095"/>
+                  </a:lnTo>
+                  <a:lnTo>
+                    <a:pt x="3008146" y="1506132"/>
+                  </a:lnTo>
+                  <a:lnTo>
+                    <a:pt x="3079768" y="1529732"/>
+                  </a:lnTo>
+                  <a:lnTo>
+                    <a:pt x="3151391" y="1552904"/>
+                  </a:lnTo>
+                  <a:lnTo>
+                    <a:pt x="3223013" y="1575656"/>
+                  </a:lnTo>
+                  <a:lnTo>
+                    <a:pt x="3294636" y="1597994"/>
+                  </a:lnTo>
+                  <a:lnTo>
+                    <a:pt x="3366258" y="1619927"/>
+                  </a:lnTo>
+                  <a:lnTo>
+                    <a:pt x="3437881" y="1641462"/>
+                  </a:lnTo>
+                  <a:lnTo>
+                    <a:pt x="3509503" y="1662606"/>
+                  </a:lnTo>
+                  <a:lnTo>
+                    <a:pt x="3581126" y="1683367"/>
+                  </a:lnTo>
+                  <a:lnTo>
+                    <a:pt x="3652748" y="1703750"/>
+                  </a:lnTo>
+                  <a:lnTo>
+                    <a:pt x="3724371" y="1723764"/>
+                  </a:lnTo>
+                  <a:lnTo>
+                    <a:pt x="3795993" y="1743414"/>
+                  </a:lnTo>
+                  <a:lnTo>
+                    <a:pt x="3867616" y="1762707"/>
+                  </a:lnTo>
+                  <a:lnTo>
+                    <a:pt x="3939238" y="1781650"/>
+                  </a:lnTo>
+                  <a:lnTo>
+                    <a:pt x="4010861" y="1800250"/>
+                  </a:lnTo>
+                  <a:lnTo>
+                    <a:pt x="4082483" y="1818512"/>
+                  </a:lnTo>
+                  <a:lnTo>
+                    <a:pt x="4154106" y="1836442"/>
+                  </a:lnTo>
+                  <a:lnTo>
+                    <a:pt x="4225729" y="1854047"/>
+                  </a:lnTo>
+                  <a:lnTo>
+                    <a:pt x="4297351" y="1871333"/>
+                  </a:lnTo>
+                  <a:lnTo>
+                    <a:pt x="4368974" y="1888304"/>
+                  </a:lnTo>
+                  <a:lnTo>
+                    <a:pt x="4440596" y="1904968"/>
+                  </a:lnTo>
+                  <a:lnTo>
+                    <a:pt x="4512219" y="1921329"/>
+                  </a:lnTo>
+                  <a:lnTo>
+                    <a:pt x="4583841" y="1937393"/>
+                  </a:lnTo>
+                  <a:lnTo>
+                    <a:pt x="4655464" y="1953165"/>
+                  </a:lnTo>
+                  <a:lnTo>
+                    <a:pt x="4727086" y="1968652"/>
+                  </a:lnTo>
+                  <a:lnTo>
+                    <a:pt x="4798709" y="1977977"/>
+                  </a:lnTo>
+                  <a:lnTo>
+                    <a:pt x="4870331" y="1980346"/>
+                  </a:lnTo>
+                  <a:lnTo>
+                    <a:pt x="4941954" y="1982708"/>
+                  </a:lnTo>
+                  <a:lnTo>
+                    <a:pt x="5013576" y="1985064"/>
+                  </a:lnTo>
+                  <a:lnTo>
+                    <a:pt x="5085199" y="1987413"/>
+                  </a:lnTo>
+                  <a:lnTo>
+                    <a:pt x="5156821" y="1989755"/>
+                  </a:lnTo>
+                  <a:lnTo>
+                    <a:pt x="5228444" y="1992090"/>
+                  </a:lnTo>
+                  <a:lnTo>
+                    <a:pt x="5300066" y="1994419"/>
+                  </a:lnTo>
+                  <a:lnTo>
+                    <a:pt x="5371689" y="1996741"/>
+                  </a:lnTo>
+                  <a:lnTo>
+                    <a:pt x="5443311" y="1999057"/>
+                  </a:lnTo>
+                  <a:lnTo>
+                    <a:pt x="5514934" y="2001365"/>
+                  </a:lnTo>
+                  <a:lnTo>
+                    <a:pt x="5586557" y="2003668"/>
+                  </a:lnTo>
+                  <a:lnTo>
+                    <a:pt x="5658179" y="2005963"/>
+                  </a:lnTo>
+                  <a:lnTo>
+                    <a:pt x="5729802" y="2008252"/>
+                  </a:lnTo>
+                  <a:lnTo>
+                    <a:pt x="5801424" y="2010535"/>
+                  </a:lnTo>
+                  <a:lnTo>
+                    <a:pt x="5873047" y="2012811"/>
+                  </a:lnTo>
+                  <a:lnTo>
+                    <a:pt x="5944669" y="2015080"/>
+                  </a:lnTo>
+                  <a:lnTo>
+                    <a:pt x="6016292" y="2017343"/>
+                  </a:lnTo>
+                  <a:lnTo>
+                    <a:pt x="6087914" y="2019600"/>
+                  </a:lnTo>
+                  <a:lnTo>
+                    <a:pt x="6159537" y="2021850"/>
+                  </a:lnTo>
+                  <a:lnTo>
+                    <a:pt x="6231159" y="2024094"/>
+                  </a:lnTo>
+                  <a:lnTo>
+                    <a:pt x="6302782" y="2026331"/>
+                  </a:lnTo>
+                  <a:lnTo>
+                    <a:pt x="6374404" y="2028562"/>
+                  </a:lnTo>
+                  <a:lnTo>
+                    <a:pt x="6446027" y="2030786"/>
+                  </a:lnTo>
+                  <a:lnTo>
+                    <a:pt x="6517649" y="2033004"/>
+                  </a:lnTo>
+                  <a:lnTo>
+                    <a:pt x="6589272" y="2035216"/>
+                  </a:lnTo>
+                  <a:lnTo>
+                    <a:pt x="6660894" y="2037421"/>
+                  </a:lnTo>
+                  <a:lnTo>
+                    <a:pt x="6732517" y="2039621"/>
+                  </a:lnTo>
+                  <a:lnTo>
+                    <a:pt x="6804139" y="2041813"/>
+                  </a:lnTo>
+                  <a:lnTo>
+                    <a:pt x="6875762" y="2044000"/>
+                  </a:lnTo>
+                  <a:lnTo>
+                    <a:pt x="6947385" y="2046180"/>
+                  </a:lnTo>
+                  <a:lnTo>
+                    <a:pt x="7019007" y="2048354"/>
+                  </a:lnTo>
+                  <a:lnTo>
+                    <a:pt x="7090630" y="2050522"/>
                   </a:lnTo>
                 </a:path>
               </a:pathLst>
@@ -4001,309 +4001,309 @@
           </p:nvSpPr>
           <p:spPr>
             <a:xfrm>
-              <a:off x="1172049" y="4555702"/>
-              <a:ext cx="7090630" cy="543237"/>
+              <a:off x="1172049" y="4553646"/>
+              <a:ext cx="7090630" cy="545928"/>
             </a:xfrm>
             <a:custGeom>
               <a:avLst/>
               <a:pathLst>
-                <a:path w="7090630" h="543237">
+                <a:path w="7090630" h="545928">
                   <a:moveTo>
-                    <a:pt x="7090630" y="543237"/>
+                    <a:pt x="7090630" y="545928"/>
                   </a:moveTo>
                   <a:lnTo>
-                    <a:pt x="7019007" y="534784"/>
-                  </a:lnTo>
-                  <a:lnTo>
-                    <a:pt x="6947385" y="526176"/>
-                  </a:lnTo>
-                  <a:lnTo>
-                    <a:pt x="6875762" y="517408"/>
-                  </a:lnTo>
-                  <a:lnTo>
-                    <a:pt x="6804139" y="508479"/>
-                  </a:lnTo>
-                  <a:lnTo>
-                    <a:pt x="6732517" y="499385"/>
-                  </a:lnTo>
-                  <a:lnTo>
-                    <a:pt x="6660894" y="490124"/>
-                  </a:lnTo>
-                  <a:lnTo>
-                    <a:pt x="6589272" y="480692"/>
-                  </a:lnTo>
-                  <a:lnTo>
-                    <a:pt x="6517649" y="471085"/>
-                  </a:lnTo>
-                  <a:lnTo>
-                    <a:pt x="6446027" y="461302"/>
-                  </a:lnTo>
-                  <a:lnTo>
-                    <a:pt x="6374404" y="451338"/>
-                  </a:lnTo>
-                  <a:lnTo>
-                    <a:pt x="6302782" y="441190"/>
-                  </a:lnTo>
-                  <a:lnTo>
-                    <a:pt x="6231159" y="430855"/>
-                  </a:lnTo>
-                  <a:lnTo>
-                    <a:pt x="6159537" y="420330"/>
-                  </a:lnTo>
-                  <a:lnTo>
-                    <a:pt x="6087914" y="409610"/>
-                  </a:lnTo>
-                  <a:lnTo>
-                    <a:pt x="6016292" y="398693"/>
-                  </a:lnTo>
-                  <a:lnTo>
-                    <a:pt x="5944669" y="387575"/>
-                  </a:lnTo>
-                  <a:lnTo>
-                    <a:pt x="5873047" y="376251"/>
-                  </a:lnTo>
-                  <a:lnTo>
-                    <a:pt x="5801424" y="364718"/>
-                  </a:lnTo>
-                  <a:lnTo>
-                    <a:pt x="5729802" y="352973"/>
-                  </a:lnTo>
-                  <a:lnTo>
-                    <a:pt x="5658179" y="341011"/>
-                  </a:lnTo>
-                  <a:lnTo>
-                    <a:pt x="5586557" y="328829"/>
-                  </a:lnTo>
-                  <a:lnTo>
-                    <a:pt x="5514934" y="316422"/>
-                  </a:lnTo>
-                  <a:lnTo>
-                    <a:pt x="5443311" y="303786"/>
-                  </a:lnTo>
-                  <a:lnTo>
-                    <a:pt x="5371689" y="290917"/>
-                  </a:lnTo>
-                  <a:lnTo>
-                    <a:pt x="5300066" y="277810"/>
-                  </a:lnTo>
-                  <a:lnTo>
-                    <a:pt x="5228444" y="264462"/>
-                  </a:lnTo>
-                  <a:lnTo>
-                    <a:pt x="5156821" y="250868"/>
-                  </a:lnTo>
-                  <a:lnTo>
-                    <a:pt x="5085199" y="237023"/>
-                  </a:lnTo>
-                  <a:lnTo>
-                    <a:pt x="5013576" y="222923"/>
-                  </a:lnTo>
-                  <a:lnTo>
-                    <a:pt x="4941954" y="208562"/>
-                  </a:lnTo>
-                  <a:lnTo>
-                    <a:pt x="4870331" y="193937"/>
-                  </a:lnTo>
-                  <a:lnTo>
-                    <a:pt x="4798709" y="179042"/>
-                  </a:lnTo>
-                  <a:lnTo>
-                    <a:pt x="4727086" y="170816"/>
-                  </a:lnTo>
-                  <a:lnTo>
-                    <a:pt x="4655464" y="168459"/>
-                  </a:lnTo>
-                  <a:lnTo>
-                    <a:pt x="4583841" y="166095"/>
-                  </a:lnTo>
-                  <a:lnTo>
-                    <a:pt x="4512219" y="163725"/>
-                  </a:lnTo>
-                  <a:lnTo>
-                    <a:pt x="4440596" y="161348"/>
-                  </a:lnTo>
-                  <a:lnTo>
-                    <a:pt x="4368974" y="158964"/>
-                  </a:lnTo>
-                  <a:lnTo>
-                    <a:pt x="4297351" y="156573"/>
-                  </a:lnTo>
-                  <a:lnTo>
-                    <a:pt x="4225729" y="154176"/>
-                  </a:lnTo>
-                  <a:lnTo>
-                    <a:pt x="4154106" y="151771"/>
-                  </a:lnTo>
-                  <a:lnTo>
-                    <a:pt x="4082483" y="149360"/>
-                  </a:lnTo>
-                  <a:lnTo>
-                    <a:pt x="4010861" y="146943"/>
-                  </a:lnTo>
-                  <a:lnTo>
-                    <a:pt x="3939238" y="144518"/>
-                  </a:lnTo>
-                  <a:lnTo>
-                    <a:pt x="3867616" y="142086"/>
-                  </a:lnTo>
-                  <a:lnTo>
-                    <a:pt x="3795993" y="139648"/>
-                  </a:lnTo>
-                  <a:lnTo>
-                    <a:pt x="3724371" y="137202"/>
-                  </a:lnTo>
-                  <a:lnTo>
-                    <a:pt x="3652748" y="134750"/>
-                  </a:lnTo>
-                  <a:lnTo>
-                    <a:pt x="3581126" y="132290"/>
-                  </a:lnTo>
-                  <a:lnTo>
-                    <a:pt x="3509503" y="129824"/>
-                  </a:lnTo>
-                  <a:lnTo>
-                    <a:pt x="3437881" y="127351"/>
-                  </a:lnTo>
-                  <a:lnTo>
-                    <a:pt x="3366258" y="124870"/>
-                  </a:lnTo>
-                  <a:lnTo>
-                    <a:pt x="3294636" y="122383"/>
-                  </a:lnTo>
-                  <a:lnTo>
-                    <a:pt x="3223013" y="119889"/>
-                  </a:lnTo>
-                  <a:lnTo>
-                    <a:pt x="3151391" y="117387"/>
-                  </a:lnTo>
-                  <a:lnTo>
-                    <a:pt x="3079768" y="114879"/>
-                  </a:lnTo>
-                  <a:lnTo>
-                    <a:pt x="3008146" y="112363"/>
-                  </a:lnTo>
-                  <a:lnTo>
-                    <a:pt x="2936523" y="109840"/>
-                  </a:lnTo>
-                  <a:lnTo>
-                    <a:pt x="2864901" y="107310"/>
-                  </a:lnTo>
-                  <a:lnTo>
-                    <a:pt x="2793278" y="104773"/>
-                  </a:lnTo>
-                  <a:lnTo>
-                    <a:pt x="2721655" y="102228"/>
-                  </a:lnTo>
-                  <a:lnTo>
-                    <a:pt x="2650033" y="99677"/>
-                  </a:lnTo>
-                  <a:lnTo>
-                    <a:pt x="2578410" y="97118"/>
-                  </a:lnTo>
-                  <a:lnTo>
-                    <a:pt x="2506788" y="94552"/>
-                  </a:lnTo>
-                  <a:lnTo>
-                    <a:pt x="2435165" y="91978"/>
-                  </a:lnTo>
-                  <a:lnTo>
-                    <a:pt x="2363543" y="89398"/>
-                  </a:lnTo>
-                  <a:lnTo>
-                    <a:pt x="2291920" y="86810"/>
-                  </a:lnTo>
-                  <a:lnTo>
-                    <a:pt x="2220298" y="84214"/>
-                  </a:lnTo>
-                  <a:lnTo>
-                    <a:pt x="2148675" y="81611"/>
-                  </a:lnTo>
-                  <a:lnTo>
-                    <a:pt x="2077053" y="79001"/>
-                  </a:lnTo>
-                  <a:lnTo>
-                    <a:pt x="2005430" y="76384"/>
-                  </a:lnTo>
-                  <a:lnTo>
-                    <a:pt x="1933808" y="73759"/>
-                  </a:lnTo>
-                  <a:lnTo>
-                    <a:pt x="1862185" y="71126"/>
-                  </a:lnTo>
-                  <a:lnTo>
-                    <a:pt x="1790563" y="68487"/>
-                  </a:lnTo>
-                  <a:lnTo>
-                    <a:pt x="1718940" y="65839"/>
-                  </a:lnTo>
-                  <a:lnTo>
-                    <a:pt x="1647318" y="63184"/>
-                  </a:lnTo>
-                  <a:lnTo>
-                    <a:pt x="1575695" y="60522"/>
-                  </a:lnTo>
-                  <a:lnTo>
-                    <a:pt x="1504073" y="57852"/>
-                  </a:lnTo>
-                  <a:lnTo>
-                    <a:pt x="1432450" y="55174"/>
-                  </a:lnTo>
-                  <a:lnTo>
-                    <a:pt x="1360827" y="52489"/>
-                  </a:lnTo>
-                  <a:lnTo>
-                    <a:pt x="1289205" y="49797"/>
-                  </a:lnTo>
-                  <a:lnTo>
-                    <a:pt x="1217582" y="47096"/>
-                  </a:lnTo>
-                  <a:lnTo>
-                    <a:pt x="1145960" y="44388"/>
-                  </a:lnTo>
-                  <a:lnTo>
-                    <a:pt x="1074337" y="41672"/>
-                  </a:lnTo>
-                  <a:lnTo>
-                    <a:pt x="1002715" y="38949"/>
-                  </a:lnTo>
-                  <a:lnTo>
-                    <a:pt x="931092" y="36218"/>
-                  </a:lnTo>
-                  <a:lnTo>
-                    <a:pt x="859470" y="33479"/>
-                  </a:lnTo>
-                  <a:lnTo>
-                    <a:pt x="787847" y="30732"/>
-                  </a:lnTo>
-                  <a:lnTo>
-                    <a:pt x="716225" y="27978"/>
-                  </a:lnTo>
-                  <a:lnTo>
-                    <a:pt x="644602" y="25215"/>
-                  </a:lnTo>
-                  <a:lnTo>
-                    <a:pt x="572980" y="22445"/>
-                  </a:lnTo>
-                  <a:lnTo>
-                    <a:pt x="501357" y="19667"/>
-                  </a:lnTo>
-                  <a:lnTo>
-                    <a:pt x="429735" y="16881"/>
-                  </a:lnTo>
-                  <a:lnTo>
-                    <a:pt x="358112" y="14088"/>
-                  </a:lnTo>
-                  <a:lnTo>
-                    <a:pt x="286490" y="11286"/>
-                  </a:lnTo>
-                  <a:lnTo>
-                    <a:pt x="214867" y="8476"/>
-                  </a:lnTo>
-                  <a:lnTo>
-                    <a:pt x="143245" y="5659"/>
-                  </a:lnTo>
-                  <a:lnTo>
-                    <a:pt x="71622" y="2833"/>
+                    <a:pt x="7019007" y="537467"/>
+                  </a:lnTo>
+                  <a:lnTo>
+                    <a:pt x="6947385" y="528849"/>
+                  </a:lnTo>
+                  <a:lnTo>
+                    <a:pt x="6875762" y="520073"/>
+                  </a:lnTo>
+                  <a:lnTo>
+                    <a:pt x="6804139" y="511134"/>
+                  </a:lnTo>
+                  <a:lnTo>
+                    <a:pt x="6732517" y="502030"/>
+                  </a:lnTo>
+                  <a:lnTo>
+                    <a:pt x="6660894" y="492757"/>
+                  </a:lnTo>
+                  <a:lnTo>
+                    <a:pt x="6589272" y="483313"/>
+                  </a:lnTo>
+                  <a:lnTo>
+                    <a:pt x="6517649" y="473695"/>
+                  </a:lnTo>
+                  <a:lnTo>
+                    <a:pt x="6446027" y="463899"/>
+                  </a:lnTo>
+                  <a:lnTo>
+                    <a:pt x="6374404" y="453921"/>
+                  </a:lnTo>
+                  <a:lnTo>
+                    <a:pt x="6302782" y="443759"/>
+                  </a:lnTo>
+                  <a:lnTo>
+                    <a:pt x="6231159" y="433410"/>
+                  </a:lnTo>
+                  <a:lnTo>
+                    <a:pt x="6159537" y="422869"/>
+                  </a:lnTo>
+                  <a:lnTo>
+                    <a:pt x="6087914" y="412133"/>
+                  </a:lnTo>
+                  <a:lnTo>
+                    <a:pt x="6016292" y="401198"/>
+                  </a:lnTo>
+                  <a:lnTo>
+                    <a:pt x="5944669" y="390062"/>
+                  </a:lnTo>
+                  <a:lnTo>
+                    <a:pt x="5873047" y="378719"/>
+                  </a:lnTo>
+                  <a:lnTo>
+                    <a:pt x="5801424" y="367167"/>
+                  </a:lnTo>
+                  <a:lnTo>
+                    <a:pt x="5729802" y="355402"/>
+                  </a:lnTo>
+                  <a:lnTo>
+                    <a:pt x="5658179" y="343418"/>
+                  </a:lnTo>
+                  <a:lnTo>
+                    <a:pt x="5586557" y="331214"/>
+                  </a:lnTo>
+                  <a:lnTo>
+                    <a:pt x="5514934" y="318784"/>
+                  </a:lnTo>
+                  <a:lnTo>
+                    <a:pt x="5443311" y="306123"/>
+                  </a:lnTo>
+                  <a:lnTo>
+                    <a:pt x="5371689" y="293229"/>
+                  </a:lnTo>
+                  <a:lnTo>
+                    <a:pt x="5300066" y="280097"/>
+                  </a:lnTo>
+                  <a:lnTo>
+                    <a:pt x="5228444" y="266721"/>
+                  </a:lnTo>
+                  <a:lnTo>
+                    <a:pt x="5156821" y="253099"/>
+                  </a:lnTo>
+                  <a:lnTo>
+                    <a:pt x="5085199" y="239224"/>
+                  </a:lnTo>
+                  <a:lnTo>
+                    <a:pt x="5013576" y="225094"/>
+                  </a:lnTo>
+                  <a:lnTo>
+                    <a:pt x="4941954" y="210701"/>
+                  </a:lnTo>
+                  <a:lnTo>
+                    <a:pt x="4870331" y="196043"/>
+                  </a:lnTo>
+                  <a:lnTo>
+                    <a:pt x="4798709" y="181114"/>
+                  </a:lnTo>
+                  <a:lnTo>
+                    <a:pt x="4727086" y="172858"/>
+                  </a:lnTo>
+                  <a:lnTo>
+                    <a:pt x="4655464" y="170475"/>
+                  </a:lnTo>
+                  <a:lnTo>
+                    <a:pt x="4583841" y="168086"/>
+                  </a:lnTo>
+                  <a:lnTo>
+                    <a:pt x="4512219" y="165689"/>
+                  </a:lnTo>
+                  <a:lnTo>
+                    <a:pt x="4440596" y="163286"/>
+                  </a:lnTo>
+                  <a:lnTo>
+                    <a:pt x="4368974" y="160876"/>
+                  </a:lnTo>
+                  <a:lnTo>
+                    <a:pt x="4297351" y="158459"/>
+                  </a:lnTo>
+                  <a:lnTo>
+                    <a:pt x="4225729" y="156035"/>
+                  </a:lnTo>
+                  <a:lnTo>
+                    <a:pt x="4154106" y="153604"/>
+                  </a:lnTo>
+                  <a:lnTo>
+                    <a:pt x="4082483" y="151166"/>
+                  </a:lnTo>
+                  <a:lnTo>
+                    <a:pt x="4010861" y="148721"/>
+                  </a:lnTo>
+                  <a:lnTo>
+                    <a:pt x="3939238" y="146269"/>
+                  </a:lnTo>
+                  <a:lnTo>
+                    <a:pt x="3867616" y="143810"/>
+                  </a:lnTo>
+                  <a:lnTo>
+                    <a:pt x="3795993" y="141344"/>
+                  </a:lnTo>
+                  <a:lnTo>
+                    <a:pt x="3724371" y="138871"/>
+                  </a:lnTo>
+                  <a:lnTo>
+                    <a:pt x="3652748" y="136391"/>
+                  </a:lnTo>
+                  <a:lnTo>
+                    <a:pt x="3581126" y="133903"/>
+                  </a:lnTo>
+                  <a:lnTo>
+                    <a:pt x="3509503" y="131409"/>
+                  </a:lnTo>
+                  <a:lnTo>
+                    <a:pt x="3437881" y="128907"/>
+                  </a:lnTo>
+                  <a:lnTo>
+                    <a:pt x="3366258" y="126398"/>
+                  </a:lnTo>
+                  <a:lnTo>
+                    <a:pt x="3294636" y="123882"/>
+                  </a:lnTo>
+                  <a:lnTo>
+                    <a:pt x="3223013" y="121359"/>
+                  </a:lnTo>
+                  <a:lnTo>
+                    <a:pt x="3151391" y="118829"/>
+                  </a:lnTo>
+                  <a:lnTo>
+                    <a:pt x="3079768" y="116291"/>
+                  </a:lnTo>
+                  <a:lnTo>
+                    <a:pt x="3008146" y="113746"/>
+                  </a:lnTo>
+                  <a:lnTo>
+                    <a:pt x="2936523" y="111194"/>
+                  </a:lnTo>
+                  <a:lnTo>
+                    <a:pt x="2864901" y="108634"/>
+                  </a:lnTo>
+                  <a:lnTo>
+                    <a:pt x="2793278" y="106067"/>
+                  </a:lnTo>
+                  <a:lnTo>
+                    <a:pt x="2721655" y="103493"/>
+                  </a:lnTo>
+                  <a:lnTo>
+                    <a:pt x="2650033" y="100911"/>
+                  </a:lnTo>
+                  <a:lnTo>
+                    <a:pt x="2578410" y="98322"/>
+                  </a:lnTo>
+                  <a:lnTo>
+                    <a:pt x="2506788" y="95726"/>
+                  </a:lnTo>
+                  <a:lnTo>
+                    <a:pt x="2435165" y="93122"/>
+                  </a:lnTo>
+                  <a:lnTo>
+                    <a:pt x="2363543" y="90510"/>
+                  </a:lnTo>
+                  <a:lnTo>
+                    <a:pt x="2291920" y="87891"/>
+                  </a:lnTo>
+                  <a:lnTo>
+                    <a:pt x="2220298" y="85265"/>
+                  </a:lnTo>
+                  <a:lnTo>
+                    <a:pt x="2148675" y="82631"/>
+                  </a:lnTo>
+                  <a:lnTo>
+                    <a:pt x="2077053" y="79989"/>
+                  </a:lnTo>
+                  <a:lnTo>
+                    <a:pt x="2005430" y="77340"/>
+                  </a:lnTo>
+                  <a:lnTo>
+                    <a:pt x="1933808" y="74684"/>
+                  </a:lnTo>
+                  <a:lnTo>
+                    <a:pt x="1862185" y="72019"/>
+                  </a:lnTo>
+                  <a:lnTo>
+                    <a:pt x="1790563" y="69347"/>
+                  </a:lnTo>
+                  <a:lnTo>
+                    <a:pt x="1718940" y="66668"/>
+                  </a:lnTo>
+                  <a:lnTo>
+                    <a:pt x="1647318" y="63980"/>
+                  </a:lnTo>
+                  <a:lnTo>
+                    <a:pt x="1575695" y="61285"/>
+                  </a:lnTo>
+                  <a:lnTo>
+                    <a:pt x="1504073" y="58583"/>
+                  </a:lnTo>
+                  <a:lnTo>
+                    <a:pt x="1432450" y="55872"/>
+                  </a:lnTo>
+                  <a:lnTo>
+                    <a:pt x="1360827" y="53154"/>
+                  </a:lnTo>
+                  <a:lnTo>
+                    <a:pt x="1289205" y="50428"/>
+                  </a:lnTo>
+                  <a:lnTo>
+                    <a:pt x="1217582" y="47694"/>
+                  </a:lnTo>
+                  <a:lnTo>
+                    <a:pt x="1145960" y="44952"/>
+                  </a:lnTo>
+                  <a:lnTo>
+                    <a:pt x="1074337" y="42203"/>
+                  </a:lnTo>
+                  <a:lnTo>
+                    <a:pt x="1002715" y="39445"/>
+                  </a:lnTo>
+                  <a:lnTo>
+                    <a:pt x="931092" y="36680"/>
+                  </a:lnTo>
+                  <a:lnTo>
+                    <a:pt x="859470" y="33906"/>
+                  </a:lnTo>
+                  <a:lnTo>
+                    <a:pt x="787847" y="31125"/>
+                  </a:lnTo>
+                  <a:lnTo>
+                    <a:pt x="716225" y="28336"/>
+                  </a:lnTo>
+                  <a:lnTo>
+                    <a:pt x="644602" y="25539"/>
+                  </a:lnTo>
+                  <a:lnTo>
+                    <a:pt x="572980" y="22733"/>
+                  </a:lnTo>
+                  <a:lnTo>
+                    <a:pt x="501357" y="19920"/>
+                  </a:lnTo>
+                  <a:lnTo>
+                    <a:pt x="429735" y="17099"/>
+                  </a:lnTo>
+                  <a:lnTo>
+                    <a:pt x="358112" y="14269"/>
+                  </a:lnTo>
+                  <a:lnTo>
+                    <a:pt x="286490" y="11432"/>
+                  </a:lnTo>
+                  <a:lnTo>
+                    <a:pt x="214867" y="8586"/>
+                  </a:lnTo>
+                  <a:lnTo>
+                    <a:pt x="143245" y="5732"/>
+                  </a:lnTo>
+                  <a:lnTo>
+                    <a:pt x="71622" y="2870"/>
                   </a:lnTo>
                   <a:lnTo>
                     <a:pt x="0" y="0"/>
@@ -4326,312 +4326,312 @@
           </p:nvSpPr>
           <p:spPr>
             <a:xfrm>
-              <a:off x="1172049" y="3883117"/>
-              <a:ext cx="7090630" cy="1085278"/>
+              <a:off x="1172049" y="3879018"/>
+              <a:ext cx="7090630" cy="1090079"/>
             </a:xfrm>
             <a:custGeom>
               <a:avLst/>
               <a:pathLst>
-                <a:path w="7090630" h="1085278">
+                <a:path w="7090630" h="1090079">
                   <a:moveTo>
                     <a:pt x="0" y="0"/>
                   </a:moveTo>
                   <a:lnTo>
-                    <a:pt x="71622" y="17576"/>
-                  </a:lnTo>
-                  <a:lnTo>
-                    <a:pt x="143245" y="34968"/>
-                  </a:lnTo>
-                  <a:lnTo>
-                    <a:pt x="214867" y="52177"/>
-                  </a:lnTo>
-                  <a:lnTo>
-                    <a:pt x="286490" y="69205"/>
-                  </a:lnTo>
-                  <a:lnTo>
-                    <a:pt x="358112" y="86055"/>
-                  </a:lnTo>
-                  <a:lnTo>
-                    <a:pt x="429735" y="102728"/>
-                  </a:lnTo>
-                  <a:lnTo>
-                    <a:pt x="501357" y="119226"/>
-                  </a:lnTo>
-                  <a:lnTo>
-                    <a:pt x="572980" y="135550"/>
-                  </a:lnTo>
-                  <a:lnTo>
-                    <a:pt x="644602" y="151704"/>
-                  </a:lnTo>
-                  <a:lnTo>
-                    <a:pt x="716225" y="167687"/>
-                  </a:lnTo>
-                  <a:lnTo>
-                    <a:pt x="787847" y="183503"/>
-                  </a:lnTo>
-                  <a:lnTo>
-                    <a:pt x="859470" y="199153"/>
-                  </a:lnTo>
-                  <a:lnTo>
-                    <a:pt x="931092" y="214638"/>
-                  </a:lnTo>
-                  <a:lnTo>
-                    <a:pt x="1002715" y="229961"/>
-                  </a:lnTo>
-                  <a:lnTo>
-                    <a:pt x="1074337" y="245123"/>
-                  </a:lnTo>
-                  <a:lnTo>
-                    <a:pt x="1145960" y="260126"/>
-                  </a:lnTo>
-                  <a:lnTo>
-                    <a:pt x="1217582" y="274971"/>
-                  </a:lnTo>
-                  <a:lnTo>
-                    <a:pt x="1289205" y="289661"/>
-                  </a:lnTo>
-                  <a:lnTo>
-                    <a:pt x="1360827" y="304196"/>
-                  </a:lnTo>
-                  <a:lnTo>
-                    <a:pt x="1432450" y="318579"/>
-                  </a:lnTo>
-                  <a:lnTo>
-                    <a:pt x="1504073" y="332810"/>
-                  </a:lnTo>
-                  <a:lnTo>
-                    <a:pt x="1575695" y="346893"/>
-                  </a:lnTo>
-                  <a:lnTo>
-                    <a:pt x="1647318" y="360827"/>
-                  </a:lnTo>
-                  <a:lnTo>
-                    <a:pt x="1718940" y="374615"/>
-                  </a:lnTo>
-                  <a:lnTo>
-                    <a:pt x="1790563" y="388258"/>
-                  </a:lnTo>
-                  <a:lnTo>
-                    <a:pt x="1862185" y="401758"/>
-                  </a:lnTo>
-                  <a:lnTo>
-                    <a:pt x="1933808" y="415117"/>
-                  </a:lnTo>
-                  <a:lnTo>
-                    <a:pt x="2005430" y="428335"/>
-                  </a:lnTo>
-                  <a:lnTo>
-                    <a:pt x="2077053" y="441414"/>
-                  </a:lnTo>
-                  <a:lnTo>
-                    <a:pt x="2148675" y="454356"/>
-                  </a:lnTo>
-                  <a:lnTo>
-                    <a:pt x="2220298" y="467162"/>
-                  </a:lnTo>
-                  <a:lnTo>
-                    <a:pt x="2291920" y="479834"/>
-                  </a:lnTo>
-                  <a:lnTo>
-                    <a:pt x="2363543" y="492373"/>
-                  </a:lnTo>
-                  <a:lnTo>
-                    <a:pt x="2435165" y="504780"/>
-                  </a:lnTo>
-                  <a:lnTo>
-                    <a:pt x="2506788" y="517057"/>
-                  </a:lnTo>
-                  <a:lnTo>
-                    <a:pt x="2578410" y="529204"/>
-                  </a:lnTo>
-                  <a:lnTo>
-                    <a:pt x="2650033" y="541225"/>
-                  </a:lnTo>
-                  <a:lnTo>
-                    <a:pt x="2721655" y="553119"/>
-                  </a:lnTo>
-                  <a:lnTo>
-                    <a:pt x="2793278" y="564888"/>
-                  </a:lnTo>
-                  <a:lnTo>
-                    <a:pt x="2864901" y="576534"/>
-                  </a:lnTo>
-                  <a:lnTo>
-                    <a:pt x="2936523" y="588057"/>
-                  </a:lnTo>
-                  <a:lnTo>
-                    <a:pt x="3008146" y="599460"/>
-                  </a:lnTo>
-                  <a:lnTo>
-                    <a:pt x="3079768" y="610742"/>
-                  </a:lnTo>
-                  <a:lnTo>
-                    <a:pt x="3151391" y="621907"/>
-                  </a:lnTo>
-                  <a:lnTo>
-                    <a:pt x="3223013" y="632954"/>
-                  </a:lnTo>
-                  <a:lnTo>
-                    <a:pt x="3294636" y="643885"/>
-                  </a:lnTo>
-                  <a:lnTo>
-                    <a:pt x="3366258" y="654701"/>
-                  </a:lnTo>
-                  <a:lnTo>
-                    <a:pt x="3437881" y="665404"/>
-                  </a:lnTo>
-                  <a:lnTo>
-                    <a:pt x="3509503" y="675994"/>
-                  </a:lnTo>
-                  <a:lnTo>
-                    <a:pt x="3581126" y="686474"/>
-                  </a:lnTo>
-                  <a:lnTo>
-                    <a:pt x="3652748" y="696843"/>
-                  </a:lnTo>
-                  <a:lnTo>
-                    <a:pt x="3724371" y="707103"/>
-                  </a:lnTo>
-                  <a:lnTo>
-                    <a:pt x="3795993" y="717256"/>
-                  </a:lnTo>
-                  <a:lnTo>
-                    <a:pt x="3867616" y="727302"/>
-                  </a:lnTo>
-                  <a:lnTo>
-                    <a:pt x="3939238" y="737242"/>
-                  </a:lnTo>
-                  <a:lnTo>
-                    <a:pt x="4010861" y="747078"/>
-                  </a:lnTo>
-                  <a:lnTo>
-                    <a:pt x="4082483" y="756811"/>
-                  </a:lnTo>
-                  <a:lnTo>
-                    <a:pt x="4154106" y="766442"/>
-                  </a:lnTo>
-                  <a:lnTo>
-                    <a:pt x="4225729" y="775972"/>
-                  </a:lnTo>
-                  <a:lnTo>
-                    <a:pt x="4297351" y="785401"/>
-                  </a:lnTo>
-                  <a:lnTo>
-                    <a:pt x="4368974" y="794732"/>
-                  </a:lnTo>
-                  <a:lnTo>
-                    <a:pt x="4440596" y="803965"/>
-                  </a:lnTo>
-                  <a:lnTo>
-                    <a:pt x="4512219" y="813100"/>
-                  </a:lnTo>
-                  <a:lnTo>
-                    <a:pt x="4583841" y="822140"/>
-                  </a:lnTo>
-                  <a:lnTo>
-                    <a:pt x="4655464" y="831085"/>
-                  </a:lnTo>
-                  <a:lnTo>
-                    <a:pt x="4727086" y="839936"/>
-                  </a:lnTo>
-                  <a:lnTo>
-                    <a:pt x="4798709" y="848694"/>
-                  </a:lnTo>
-                  <a:lnTo>
-                    <a:pt x="4870331" y="857360"/>
-                  </a:lnTo>
-                  <a:lnTo>
-                    <a:pt x="4941954" y="865935"/>
-                  </a:lnTo>
-                  <a:lnTo>
-                    <a:pt x="5013576" y="874420"/>
-                  </a:lnTo>
-                  <a:lnTo>
-                    <a:pt x="5085199" y="882816"/>
-                  </a:lnTo>
-                  <a:lnTo>
-                    <a:pt x="5156821" y="891124"/>
-                  </a:lnTo>
-                  <a:lnTo>
-                    <a:pt x="5228444" y="899345"/>
-                  </a:lnTo>
-                  <a:lnTo>
-                    <a:pt x="5300066" y="907479"/>
-                  </a:lnTo>
-                  <a:lnTo>
-                    <a:pt x="5371689" y="915528"/>
-                  </a:lnTo>
-                  <a:lnTo>
-                    <a:pt x="5443311" y="923492"/>
-                  </a:lnTo>
-                  <a:lnTo>
-                    <a:pt x="5514934" y="931373"/>
-                  </a:lnTo>
-                  <a:lnTo>
-                    <a:pt x="5586557" y="939171"/>
-                  </a:lnTo>
-                  <a:lnTo>
-                    <a:pt x="5658179" y="946887"/>
-                  </a:lnTo>
-                  <a:lnTo>
-                    <a:pt x="5729802" y="954522"/>
-                  </a:lnTo>
-                  <a:lnTo>
-                    <a:pt x="5801424" y="962077"/>
-                  </a:lnTo>
-                  <a:lnTo>
-                    <a:pt x="5873047" y="969553"/>
-                  </a:lnTo>
-                  <a:lnTo>
-                    <a:pt x="5944669" y="976950"/>
-                  </a:lnTo>
-                  <a:lnTo>
-                    <a:pt x="6016292" y="984270"/>
-                  </a:lnTo>
-                  <a:lnTo>
-                    <a:pt x="6087914" y="991513"/>
-                  </a:lnTo>
-                  <a:lnTo>
-                    <a:pt x="6159537" y="998679"/>
-                  </a:lnTo>
-                  <a:lnTo>
-                    <a:pt x="6231159" y="1005771"/>
-                  </a:lnTo>
-                  <a:lnTo>
-                    <a:pt x="6302782" y="1012788"/>
-                  </a:lnTo>
-                  <a:lnTo>
-                    <a:pt x="6374404" y="1019731"/>
-                  </a:lnTo>
-                  <a:lnTo>
-                    <a:pt x="6446027" y="1026601"/>
-                  </a:lnTo>
-                  <a:lnTo>
-                    <a:pt x="6517649" y="1033400"/>
-                  </a:lnTo>
-                  <a:lnTo>
-                    <a:pt x="6589272" y="1040126"/>
-                  </a:lnTo>
-                  <a:lnTo>
-                    <a:pt x="6660894" y="1046783"/>
-                  </a:lnTo>
-                  <a:lnTo>
-                    <a:pt x="6732517" y="1053369"/>
-                  </a:lnTo>
-                  <a:lnTo>
-                    <a:pt x="6804139" y="1059886"/>
-                  </a:lnTo>
-                  <a:lnTo>
-                    <a:pt x="6875762" y="1066335"/>
-                  </a:lnTo>
-                  <a:lnTo>
-                    <a:pt x="6947385" y="1072716"/>
-                  </a:lnTo>
-                  <a:lnTo>
-                    <a:pt x="7019007" y="1079030"/>
-                  </a:lnTo>
-                  <a:lnTo>
-                    <a:pt x="7090630" y="1085278"/>
+                    <a:pt x="71622" y="17680"/>
+                  </a:lnTo>
+                  <a:lnTo>
+                    <a:pt x="143245" y="35174"/>
+                  </a:lnTo>
+                  <a:lnTo>
+                    <a:pt x="214867" y="52484"/>
+                  </a:lnTo>
+                  <a:lnTo>
+                    <a:pt x="286490" y="69611"/>
+                  </a:lnTo>
+                  <a:lnTo>
+                    <a:pt x="358112" y="86558"/>
+                  </a:lnTo>
+                  <a:lnTo>
+                    <a:pt x="429735" y="103327"/>
+                  </a:lnTo>
+                  <a:lnTo>
+                    <a:pt x="501357" y="119919"/>
+                  </a:lnTo>
+                  <a:lnTo>
+                    <a:pt x="572980" y="136336"/>
+                  </a:lnTo>
+                  <a:lnTo>
+                    <a:pt x="644602" y="152580"/>
+                  </a:lnTo>
+                  <a:lnTo>
+                    <a:pt x="716225" y="168653"/>
+                  </a:lnTo>
+                  <a:lnTo>
+                    <a:pt x="787847" y="184556"/>
+                  </a:lnTo>
+                  <a:lnTo>
+                    <a:pt x="859470" y="200292"/>
+                  </a:lnTo>
+                  <a:lnTo>
+                    <a:pt x="931092" y="215863"/>
+                  </a:lnTo>
+                  <a:lnTo>
+                    <a:pt x="1002715" y="231269"/>
+                  </a:lnTo>
+                  <a:lnTo>
+                    <a:pt x="1074337" y="246513"/>
+                  </a:lnTo>
+                  <a:lnTo>
+                    <a:pt x="1145960" y="261596"/>
+                  </a:lnTo>
+                  <a:lnTo>
+                    <a:pt x="1217582" y="276521"/>
+                  </a:lnTo>
+                  <a:lnTo>
+                    <a:pt x="1289205" y="291288"/>
+                  </a:lnTo>
+                  <a:lnTo>
+                    <a:pt x="1360827" y="305899"/>
+                  </a:lnTo>
+                  <a:lnTo>
+                    <a:pt x="1432450" y="320357"/>
+                  </a:lnTo>
+                  <a:lnTo>
+                    <a:pt x="1504073" y="334663"/>
+                  </a:lnTo>
+                  <a:lnTo>
+                    <a:pt x="1575695" y="348817"/>
+                  </a:lnTo>
+                  <a:lnTo>
+                    <a:pt x="1647318" y="362823"/>
+                  </a:lnTo>
+                  <a:lnTo>
+                    <a:pt x="1718940" y="376681"/>
+                  </a:lnTo>
+                  <a:lnTo>
+                    <a:pt x="1790563" y="390393"/>
+                  </a:lnTo>
+                  <a:lnTo>
+                    <a:pt x="1862185" y="403960"/>
+                  </a:lnTo>
+                  <a:lnTo>
+                    <a:pt x="1933808" y="417385"/>
+                  </a:lnTo>
+                  <a:lnTo>
+                    <a:pt x="2005430" y="430668"/>
+                  </a:lnTo>
+                  <a:lnTo>
+                    <a:pt x="2077053" y="443811"/>
+                  </a:lnTo>
+                  <a:lnTo>
+                    <a:pt x="2148675" y="456816"/>
+                  </a:lnTo>
+                  <a:lnTo>
+                    <a:pt x="2220298" y="469684"/>
+                  </a:lnTo>
+                  <a:lnTo>
+                    <a:pt x="2291920" y="482416"/>
+                  </a:lnTo>
+                  <a:lnTo>
+                    <a:pt x="2363543" y="495014"/>
+                  </a:lnTo>
+                  <a:lnTo>
+                    <a:pt x="2435165" y="507479"/>
+                  </a:lnTo>
+                  <a:lnTo>
+                    <a:pt x="2506788" y="519813"/>
+                  </a:lnTo>
+                  <a:lnTo>
+                    <a:pt x="2578410" y="532018"/>
+                  </a:lnTo>
+                  <a:lnTo>
+                    <a:pt x="2650033" y="544093"/>
+                  </a:lnTo>
+                  <a:lnTo>
+                    <a:pt x="2721655" y="556041"/>
+                  </a:lnTo>
+                  <a:lnTo>
+                    <a:pt x="2793278" y="567864"/>
+                  </a:lnTo>
+                  <a:lnTo>
+                    <a:pt x="2864901" y="579562"/>
+                  </a:lnTo>
+                  <a:lnTo>
+                    <a:pt x="2936523" y="591136"/>
+                  </a:lnTo>
+                  <a:lnTo>
+                    <a:pt x="3008146" y="602589"/>
+                  </a:lnTo>
+                  <a:lnTo>
+                    <a:pt x="3079768" y="613921"/>
+                  </a:lnTo>
+                  <a:lnTo>
+                    <a:pt x="3151391" y="625134"/>
+                  </a:lnTo>
+                  <a:lnTo>
+                    <a:pt x="3223013" y="636228"/>
+                  </a:lnTo>
+                  <a:lnTo>
+                    <a:pt x="3294636" y="647206"/>
+                  </a:lnTo>
+                  <a:lnTo>
+                    <a:pt x="3366258" y="658068"/>
+                  </a:lnTo>
+                  <a:lnTo>
+                    <a:pt x="3437881" y="668815"/>
+                  </a:lnTo>
+                  <a:lnTo>
+                    <a:pt x="3509503" y="679450"/>
+                  </a:lnTo>
+                  <a:lnTo>
+                    <a:pt x="3581126" y="689972"/>
+                  </a:lnTo>
+                  <a:lnTo>
+                    <a:pt x="3652748" y="700383"/>
+                  </a:lnTo>
+                  <a:lnTo>
+                    <a:pt x="3724371" y="710685"/>
+                  </a:lnTo>
+                  <a:lnTo>
+                    <a:pt x="3795993" y="720878"/>
+                  </a:lnTo>
+                  <a:lnTo>
+                    <a:pt x="3867616" y="730964"/>
+                  </a:lnTo>
+                  <a:lnTo>
+                    <a:pt x="3939238" y="740944"/>
+                  </a:lnTo>
+                  <a:lnTo>
+                    <a:pt x="4010861" y="750818"/>
+                  </a:lnTo>
+                  <a:lnTo>
+                    <a:pt x="4082483" y="760589"/>
+                  </a:lnTo>
+                  <a:lnTo>
+                    <a:pt x="4154106" y="770256"/>
+                  </a:lnTo>
+                  <a:lnTo>
+                    <a:pt x="4225729" y="779822"/>
+                  </a:lnTo>
+                  <a:lnTo>
+                    <a:pt x="4297351" y="789287"/>
+                  </a:lnTo>
+                  <a:lnTo>
+                    <a:pt x="4368974" y="798652"/>
+                  </a:lnTo>
+                  <a:lnTo>
+                    <a:pt x="4440596" y="807918"/>
+                  </a:lnTo>
+                  <a:lnTo>
+                    <a:pt x="4512219" y="817087"/>
+                  </a:lnTo>
+                  <a:lnTo>
+                    <a:pt x="4583841" y="826159"/>
+                  </a:lnTo>
+                  <a:lnTo>
+                    <a:pt x="4655464" y="835136"/>
+                  </a:lnTo>
+                  <a:lnTo>
+                    <a:pt x="4727086" y="844018"/>
+                  </a:lnTo>
+                  <a:lnTo>
+                    <a:pt x="4798709" y="852807"/>
+                  </a:lnTo>
+                  <a:lnTo>
+                    <a:pt x="4870331" y="861503"/>
+                  </a:lnTo>
+                  <a:lnTo>
+                    <a:pt x="4941954" y="870107"/>
+                  </a:lnTo>
+                  <a:lnTo>
+                    <a:pt x="5013576" y="878621"/>
+                  </a:lnTo>
+                  <a:lnTo>
+                    <a:pt x="5085199" y="887045"/>
+                  </a:lnTo>
+                  <a:lnTo>
+                    <a:pt x="5156821" y="895380"/>
+                  </a:lnTo>
+                  <a:lnTo>
+                    <a:pt x="5228444" y="903627"/>
+                  </a:lnTo>
+                  <a:lnTo>
+                    <a:pt x="5300066" y="911788"/>
+                  </a:lnTo>
+                  <a:lnTo>
+                    <a:pt x="5371689" y="919863"/>
+                  </a:lnTo>
+                  <a:lnTo>
+                    <a:pt x="5443311" y="927852"/>
+                  </a:lnTo>
+                  <a:lnTo>
+                    <a:pt x="5514934" y="935757"/>
+                  </a:lnTo>
+                  <a:lnTo>
+                    <a:pt x="5586557" y="943579"/>
+                  </a:lnTo>
+                  <a:lnTo>
+                    <a:pt x="5658179" y="951319"/>
+                  </a:lnTo>
+                  <a:lnTo>
+                    <a:pt x="5729802" y="958977"/>
+                  </a:lnTo>
+                  <a:lnTo>
+                    <a:pt x="5801424" y="966555"/>
+                  </a:lnTo>
+                  <a:lnTo>
+                    <a:pt x="5873047" y="974052"/>
+                  </a:lnTo>
+                  <a:lnTo>
+                    <a:pt x="5944669" y="981471"/>
+                  </a:lnTo>
+                  <a:lnTo>
+                    <a:pt x="6016292" y="988811"/>
+                  </a:lnTo>
+                  <a:lnTo>
+                    <a:pt x="6087914" y="996074"/>
+                  </a:lnTo>
+                  <a:lnTo>
+                    <a:pt x="6159537" y="1003261"/>
+                  </a:lnTo>
+                  <a:lnTo>
+                    <a:pt x="6231159" y="1010372"/>
+                  </a:lnTo>
+                  <a:lnTo>
+                    <a:pt x="6302782" y="1017408"/>
+                  </a:lnTo>
+                  <a:lnTo>
+                    <a:pt x="6374404" y="1024370"/>
+                  </a:lnTo>
+                  <a:lnTo>
+                    <a:pt x="6446027" y="1031258"/>
+                  </a:lnTo>
+                  <a:lnTo>
+                    <a:pt x="6517649" y="1038074"/>
+                  </a:lnTo>
+                  <a:lnTo>
+                    <a:pt x="6589272" y="1044818"/>
+                  </a:lnTo>
+                  <a:lnTo>
+                    <a:pt x="6660894" y="1051491"/>
+                  </a:lnTo>
+                  <a:lnTo>
+                    <a:pt x="6732517" y="1058094"/>
+                  </a:lnTo>
+                  <a:lnTo>
+                    <a:pt x="6804139" y="1064627"/>
+                  </a:lnTo>
+                  <a:lnTo>
+                    <a:pt x="6875762" y="1071092"/>
+                  </a:lnTo>
+                  <a:lnTo>
+                    <a:pt x="6947385" y="1077488"/>
+                  </a:lnTo>
+                  <a:lnTo>
+                    <a:pt x="7019007" y="1083817"/>
+                  </a:lnTo>
+                  <a:lnTo>
+                    <a:pt x="7090630" y="1090079"/>
                   </a:lnTo>
                 </a:path>
               </a:pathLst>
@@ -5371,7 +5371,7 @@
                   <a:latin typeface="Helvetica"/>
                   <a:cs typeface="Helvetica"/>
                 </a:rPr>
-                <a:t>subHR per 10 mL/min decline: 1.14 (1.04-1.25), p_Bonf = 0.044 (n = 6)  |  per IQR decline (Δ = 23.3): 1.35 (1.08-1.68)  |  IQR: [-12.8, 10.5]</a:t>
+                <a:t>subHR per 10 mL/min decline: 1.14 (1.04-1.25), p_Bonf = 0.043 (n = 6)  |  per IQR decline (Δ = 23.3): 1.35 (1.08-1.68)  |  IQR: [-12.8, 10.5]</a:t>
               </a:r>
             </a:p>
           </p:txBody>
